--- a/dist/noncovered-surgery-guide.pptx
+++ b/dist/noncovered-surgery-guide.pptx
@@ -20,9 +20,13 @@
     <p:sldId id="268" r:id="rId14"/>
     <p:sldId id="269" r:id="rId15"/>
     <p:sldId id="270" r:id="rId16"/>
+    <p:sldId id="271" r:id="rId17"/>
+    <p:sldId id="272" r:id="rId18"/>
+    <p:sldId id="273" r:id="rId19"/>
+    <p:sldId id="274" r:id="rId20"/>
   </p:sldIdLst>
   <p:notesMasterIdLst>
-    <p:notesMasterId r:id="rId17"/>
+    <p:notesMasterId r:id="rId21"/>
   </p:notesMasterIdLst>
   <p:sldSz cx="9144000" cy="5143500"/>
   <p:notesSz cx="5143500" cy="9144000"/>
@@ -121,19 +125,19 @@
   <p:extLst>
     <p:ext uri="{521415D9-36F7-43E2-AB2F-B90AF26B5E84}">
       <p14:sectionLst xmlns:p14="http://schemas.microsoft.com/office/powerpoint/2010/main">
-        <p14:section name="표지" id="{f1dcb11f-4570-912d-e6b3-ff0aac00b955}">
+        <p14:section name="표지" id="{abdfdee9-b8d6-d2eb-1bf0-3e8eaebb851e}">
           <p14:sldIdLst>
             <p14:sldId id="256"/>
           </p14:sldIdLst>
         </p14:section>
-        <p14:section name="한눈에 보기" id="{09acbdd5-9eee-5408-cefa-2b32c9892f6b}">
+        <p14:section name="한눈에 보기" id="{1ef16ef6-2194-5916-1703-fe7cdf2bb38b}">
           <p14:sldIdLst>
             <p14:sldId id="257"/>
             <p14:sldId id="258"/>
             <p14:sldId id="259"/>
           </p14:sldIdLst>
         </p14:section>
-        <p14:section name="수술별 상세" id="{6ae29ad1-ce94-bdee-4316-396316386b33}">
+        <p14:section name="수술별 상세" id="{638b512d-e291-1d7f-d8b9-a29ed1a6e4a9}">
           <p14:sldIdLst>
             <p14:sldId id="260"/>
             <p14:sldId id="261"/>
@@ -145,15 +149,19 @@
             <p14:sldId id="267"/>
           </p14:sldIdLst>
         </p14:section>
-        <p14:section name="질병으로 찾기" id="{0c5787fc-ef7b-8d13-be2a-2ae2a5740466}">
+        <p14:section name="질병으로 찾기" id="{fb6a8fef-9e08-ab47-be76-98eada5f5a50}">
           <p14:sldIdLst>
             <p14:sldId id="268"/>
           </p14:sldIdLst>
         </p14:section>
-        <p14:section name="영업 포인트" id="{1dd1b2f3-801c-9f58-8304-c3bb15b5fdfe}">
+        <p14:section name="영업 포인트" id="{f7e65e90-af6e-e5c1-7b0d-e9c00563cb24}">
           <p14:sldIdLst>
             <p14:sldId id="269"/>
             <p14:sldId id="270"/>
+            <p14:sldId id="271"/>
+            <p14:sldId id="272"/>
+            <p14:sldId id="273"/>
+            <p14:sldId id="274"/>
           </p14:sldIdLst>
         </p14:section>
       </p14:sectionLst>
@@ -1345,6 +1353,358 @@
             <a:fld id="{F7021451-1387-4CA6-816F-3879F97B5CBC}" type="slidenum">
               <a:rPr lang="en-US"/>
               <a:t>15</a:t>
+            </a:fld>
+            <a:endParaRPr lang="en-US"/>
+          </a:p>
+        </p:txBody>
+      </p:sp>
+    </p:spTree>
+    <p:extLst>
+      <p:ext uri="{BB962C8B-B14F-4D97-AF65-F5344CB8AC3E}">
+        <p14:creationId xmlns:p14="http://schemas.microsoft.com/office/powerpoint/2010/main" val="1024086991"/>
+      </p:ext>
+    </p:extLst>
+  </p:cSld>
+  <p:clrMapOvr>
+    <a:masterClrMapping/>
+  </p:clrMapOvr>
+</p:notes>
+</file>
+
+<file path=ppt/notesSlides/notesSlide16.xml><?xml version="1.0" encoding="utf-8"?>
+<p:notes xmlns:a="http://schemas.openxmlformats.org/drawingml/2006/main" xmlns:r="http://schemas.openxmlformats.org/officeDocument/2006/relationships" xmlns:p="http://schemas.openxmlformats.org/presentationml/2006/main">
+  <p:cSld>
+    <p:spTree>
+      <p:nvGrpSpPr>
+        <p:cNvPr id="1" name=""/>
+        <p:cNvGrpSpPr/>
+        <p:nvPr/>
+      </p:nvGrpSpPr>
+      <p:grpSpPr>
+        <a:xfrm>
+          <a:off x="0" y="0"/>
+          <a:ext cx="0" cy="0"/>
+          <a:chOff x="0" y="0"/>
+          <a:chExt cx="0" cy="0"/>
+        </a:xfrm>
+      </p:grpSpPr>
+      <p:sp>
+        <p:nvSpPr>
+          <p:cNvPr id="2" name="Slide Image Placeholder 1"/>
+          <p:cNvSpPr>
+            <a:spLocks noGrp="1" noRot="1" noChangeAspect="1"/>
+          </p:cNvSpPr>
+          <p:nvPr>
+            <p:ph type="sldImg"/>
+          </p:nvPr>
+        </p:nvSpPr>
+        <p:spPr/>
+      </p:sp>
+      <p:sp>
+        <p:nvSpPr>
+          <p:cNvPr id="3" name="Notes Placeholder 2"/>
+          <p:cNvSpPr>
+            <a:spLocks noGrp="1"/>
+          </p:cNvSpPr>
+          <p:nvPr>
+            <p:ph type="body" idx="1"/>
+          </p:nvPr>
+        </p:nvSpPr>
+        <p:spPr/>
+        <p:txBody>
+          <a:bodyPr/>
+          <a:lstStyle/>
+          <a:p>
+            <a:r>
+              <a:rPr lang="en-US" dirty="0"/>
+              <a:t/>
+            </a:r>
+            <a:endParaRPr lang="en-US" dirty="0"/>
+          </a:p>
+        </p:txBody>
+      </p:sp>
+      <p:sp>
+        <p:nvSpPr>
+          <p:cNvPr id="4" name="Slide Number Placeholder 3"/>
+          <p:cNvSpPr>
+            <a:spLocks noGrp="1"/>
+          </p:cNvSpPr>
+          <p:nvPr>
+            <p:ph type="sldNum" sz="quarter" idx="10"/>
+          </p:nvPr>
+        </p:nvSpPr>
+        <p:spPr/>
+        <p:txBody>
+          <a:bodyPr/>
+          <a:lstStyle/>
+          <a:p>
+            <a:fld id="{F7021451-1387-4CA6-816F-3879F97B5CBC}" type="slidenum">
+              <a:rPr lang="en-US"/>
+              <a:t>16</a:t>
+            </a:fld>
+            <a:endParaRPr lang="en-US"/>
+          </a:p>
+        </p:txBody>
+      </p:sp>
+    </p:spTree>
+    <p:extLst>
+      <p:ext uri="{BB962C8B-B14F-4D97-AF65-F5344CB8AC3E}">
+        <p14:creationId xmlns:p14="http://schemas.microsoft.com/office/powerpoint/2010/main" val="1024086991"/>
+      </p:ext>
+    </p:extLst>
+  </p:cSld>
+  <p:clrMapOvr>
+    <a:masterClrMapping/>
+  </p:clrMapOvr>
+</p:notes>
+</file>
+
+<file path=ppt/notesSlides/notesSlide17.xml><?xml version="1.0" encoding="utf-8"?>
+<p:notes xmlns:a="http://schemas.openxmlformats.org/drawingml/2006/main" xmlns:r="http://schemas.openxmlformats.org/officeDocument/2006/relationships" xmlns:p="http://schemas.openxmlformats.org/presentationml/2006/main">
+  <p:cSld>
+    <p:spTree>
+      <p:nvGrpSpPr>
+        <p:cNvPr id="1" name=""/>
+        <p:cNvGrpSpPr/>
+        <p:nvPr/>
+      </p:nvGrpSpPr>
+      <p:grpSpPr>
+        <a:xfrm>
+          <a:off x="0" y="0"/>
+          <a:ext cx="0" cy="0"/>
+          <a:chOff x="0" y="0"/>
+          <a:chExt cx="0" cy="0"/>
+        </a:xfrm>
+      </p:grpSpPr>
+      <p:sp>
+        <p:nvSpPr>
+          <p:cNvPr id="2" name="Slide Image Placeholder 1"/>
+          <p:cNvSpPr>
+            <a:spLocks noGrp="1" noRot="1" noChangeAspect="1"/>
+          </p:cNvSpPr>
+          <p:nvPr>
+            <p:ph type="sldImg"/>
+          </p:nvPr>
+        </p:nvSpPr>
+        <p:spPr/>
+      </p:sp>
+      <p:sp>
+        <p:nvSpPr>
+          <p:cNvPr id="3" name="Notes Placeholder 2"/>
+          <p:cNvSpPr>
+            <a:spLocks noGrp="1"/>
+          </p:cNvSpPr>
+          <p:nvPr>
+            <p:ph type="body" idx="1"/>
+          </p:nvPr>
+        </p:nvSpPr>
+        <p:spPr/>
+        <p:txBody>
+          <a:bodyPr/>
+          <a:lstStyle/>
+          <a:p>
+            <a:r>
+              <a:rPr lang="en-US" dirty="0"/>
+              <a:t/>
+            </a:r>
+            <a:endParaRPr lang="en-US" dirty="0"/>
+          </a:p>
+        </p:txBody>
+      </p:sp>
+      <p:sp>
+        <p:nvSpPr>
+          <p:cNvPr id="4" name="Slide Number Placeholder 3"/>
+          <p:cNvSpPr>
+            <a:spLocks noGrp="1"/>
+          </p:cNvSpPr>
+          <p:nvPr>
+            <p:ph type="sldNum" sz="quarter" idx="10"/>
+          </p:nvPr>
+        </p:nvSpPr>
+        <p:spPr/>
+        <p:txBody>
+          <a:bodyPr/>
+          <a:lstStyle/>
+          <a:p>
+            <a:fld id="{F7021451-1387-4CA6-816F-3879F97B5CBC}" type="slidenum">
+              <a:rPr lang="en-US"/>
+              <a:t>17</a:t>
+            </a:fld>
+            <a:endParaRPr lang="en-US"/>
+          </a:p>
+        </p:txBody>
+      </p:sp>
+    </p:spTree>
+    <p:extLst>
+      <p:ext uri="{BB962C8B-B14F-4D97-AF65-F5344CB8AC3E}">
+        <p14:creationId xmlns:p14="http://schemas.microsoft.com/office/powerpoint/2010/main" val="1024086991"/>
+      </p:ext>
+    </p:extLst>
+  </p:cSld>
+  <p:clrMapOvr>
+    <a:masterClrMapping/>
+  </p:clrMapOvr>
+</p:notes>
+</file>
+
+<file path=ppt/notesSlides/notesSlide18.xml><?xml version="1.0" encoding="utf-8"?>
+<p:notes xmlns:a="http://schemas.openxmlformats.org/drawingml/2006/main" xmlns:r="http://schemas.openxmlformats.org/officeDocument/2006/relationships" xmlns:p="http://schemas.openxmlformats.org/presentationml/2006/main">
+  <p:cSld>
+    <p:spTree>
+      <p:nvGrpSpPr>
+        <p:cNvPr id="1" name=""/>
+        <p:cNvGrpSpPr/>
+        <p:nvPr/>
+      </p:nvGrpSpPr>
+      <p:grpSpPr>
+        <a:xfrm>
+          <a:off x="0" y="0"/>
+          <a:ext cx="0" cy="0"/>
+          <a:chOff x="0" y="0"/>
+          <a:chExt cx="0" cy="0"/>
+        </a:xfrm>
+      </p:grpSpPr>
+      <p:sp>
+        <p:nvSpPr>
+          <p:cNvPr id="2" name="Slide Image Placeholder 1"/>
+          <p:cNvSpPr>
+            <a:spLocks noGrp="1" noRot="1" noChangeAspect="1"/>
+          </p:cNvSpPr>
+          <p:nvPr>
+            <p:ph type="sldImg"/>
+          </p:nvPr>
+        </p:nvSpPr>
+        <p:spPr/>
+      </p:sp>
+      <p:sp>
+        <p:nvSpPr>
+          <p:cNvPr id="3" name="Notes Placeholder 2"/>
+          <p:cNvSpPr>
+            <a:spLocks noGrp="1"/>
+          </p:cNvSpPr>
+          <p:nvPr>
+            <p:ph type="body" idx="1"/>
+          </p:nvPr>
+        </p:nvSpPr>
+        <p:spPr/>
+        <p:txBody>
+          <a:bodyPr/>
+          <a:lstStyle/>
+          <a:p>
+            <a:r>
+              <a:rPr lang="en-US" dirty="0"/>
+              <a:t/>
+            </a:r>
+            <a:endParaRPr lang="en-US" dirty="0"/>
+          </a:p>
+        </p:txBody>
+      </p:sp>
+      <p:sp>
+        <p:nvSpPr>
+          <p:cNvPr id="4" name="Slide Number Placeholder 3"/>
+          <p:cNvSpPr>
+            <a:spLocks noGrp="1"/>
+          </p:cNvSpPr>
+          <p:nvPr>
+            <p:ph type="sldNum" sz="quarter" idx="10"/>
+          </p:nvPr>
+        </p:nvSpPr>
+        <p:spPr/>
+        <p:txBody>
+          <a:bodyPr/>
+          <a:lstStyle/>
+          <a:p>
+            <a:fld id="{F7021451-1387-4CA6-816F-3879F97B5CBC}" type="slidenum">
+              <a:rPr lang="en-US"/>
+              <a:t>18</a:t>
+            </a:fld>
+            <a:endParaRPr lang="en-US"/>
+          </a:p>
+        </p:txBody>
+      </p:sp>
+    </p:spTree>
+    <p:extLst>
+      <p:ext uri="{BB962C8B-B14F-4D97-AF65-F5344CB8AC3E}">
+        <p14:creationId xmlns:p14="http://schemas.microsoft.com/office/powerpoint/2010/main" val="1024086991"/>
+      </p:ext>
+    </p:extLst>
+  </p:cSld>
+  <p:clrMapOvr>
+    <a:masterClrMapping/>
+  </p:clrMapOvr>
+</p:notes>
+</file>
+
+<file path=ppt/notesSlides/notesSlide19.xml><?xml version="1.0" encoding="utf-8"?>
+<p:notes xmlns:a="http://schemas.openxmlformats.org/drawingml/2006/main" xmlns:r="http://schemas.openxmlformats.org/officeDocument/2006/relationships" xmlns:p="http://schemas.openxmlformats.org/presentationml/2006/main">
+  <p:cSld>
+    <p:spTree>
+      <p:nvGrpSpPr>
+        <p:cNvPr id="1" name=""/>
+        <p:cNvGrpSpPr/>
+        <p:nvPr/>
+      </p:nvGrpSpPr>
+      <p:grpSpPr>
+        <a:xfrm>
+          <a:off x="0" y="0"/>
+          <a:ext cx="0" cy="0"/>
+          <a:chOff x="0" y="0"/>
+          <a:chExt cx="0" cy="0"/>
+        </a:xfrm>
+      </p:grpSpPr>
+      <p:sp>
+        <p:nvSpPr>
+          <p:cNvPr id="2" name="Slide Image Placeholder 1"/>
+          <p:cNvSpPr>
+            <a:spLocks noGrp="1" noRot="1" noChangeAspect="1"/>
+          </p:cNvSpPr>
+          <p:nvPr>
+            <p:ph type="sldImg"/>
+          </p:nvPr>
+        </p:nvSpPr>
+        <p:spPr/>
+      </p:sp>
+      <p:sp>
+        <p:nvSpPr>
+          <p:cNvPr id="3" name="Notes Placeholder 2"/>
+          <p:cNvSpPr>
+            <a:spLocks noGrp="1"/>
+          </p:cNvSpPr>
+          <p:nvPr>
+            <p:ph type="body" idx="1"/>
+          </p:nvPr>
+        </p:nvSpPr>
+        <p:spPr/>
+        <p:txBody>
+          <a:bodyPr/>
+          <a:lstStyle/>
+          <a:p>
+            <a:r>
+              <a:rPr lang="en-US" dirty="0"/>
+              <a:t/>
+            </a:r>
+            <a:endParaRPr lang="en-US" dirty="0"/>
+          </a:p>
+        </p:txBody>
+      </p:sp>
+      <p:sp>
+        <p:nvSpPr>
+          <p:cNvPr id="4" name="Slide Number Placeholder 3"/>
+          <p:cNvSpPr>
+            <a:spLocks noGrp="1"/>
+          </p:cNvSpPr>
+          <p:nvPr>
+            <p:ph type="sldNum" sz="quarter" idx="10"/>
+          </p:nvPr>
+        </p:nvSpPr>
+        <p:spPr/>
+        <p:txBody>
+          <a:bodyPr/>
+          <a:lstStyle/>
+          <a:p>
+            <a:fld id="{F7021451-1387-4CA6-816F-3879F97B5CBC}" type="slidenum">
+              <a:rPr lang="en-US"/>
+              <a:t>19</a:t>
             </a:fld>
             <a:endParaRPr lang="en-US"/>
           </a:p>
@@ -6168,7 +6528,7 @@
                   <a:schemeClr val="tx1"/>
                 </a:solidFill>
               </a:rPr>
-              <a:t>실손만 있으면 충분할까요?</a:t>
+              <a:t>4세대 vs 5세대 실손, 고객이 내는 돈</a:t>
             </a:r>
             <a:endParaRPr lang="en-US" sz="2600" dirty="0"/>
           </a:p>
@@ -6176,18 +6536,134 @@
       </p:sp>
       <p:sp>
         <p:nvSpPr>
-          <p:cNvPr id="3" name="step-card-0"/>
+          <p:cNvPr id="3" name="leg4"/>
+          <p:cNvSpPr txBox="1"/>
+          <p:nvPr/>
+        </p:nvSpPr>
+        <p:spPr>
+          <a:xfrm>
+            <a:off x="3749040" y="1051560"/>
+            <a:ext cx="822960" cy="274320"/>
+          </a:xfrm>
+          <a:prstGeom prst="rect">
+            <a:avLst/>
+          </a:prstGeom>
+          <a:noFill/>
+          <a:ln/>
+        </p:spPr>
+        <p:txBody>
+          <a:bodyPr wrap="square" lIns="0" tIns="0" rIns="0" bIns="0" rtlCol="0" anchor="ctr"/>
+          <a:lstStyle/>
+          <a:p>
+            <a:pPr indent="0" marL="0">
+              <a:buNone/>
+            </a:pPr>
+            <a:r>
+              <a:rPr lang="en-US" sz="1100" b="1" dirty="0">
+                <a:solidFill>
+                  <a:schemeClr val="accent3"/>
+                </a:solidFill>
+              </a:rPr>
+              <a:t>4세대</a:t>
+            </a:r>
+            <a:endParaRPr lang="en-US" sz="1100" dirty="0"/>
+          </a:p>
+        </p:txBody>
+      </p:sp>
+      <p:sp>
+        <p:nvSpPr>
+          <p:cNvPr id="4" name="leg4-sw"/>
           <p:cNvSpPr/>
           <p:nvPr/>
         </p:nvSpPr>
         <p:spPr>
           <a:xfrm>
-            <a:off x="548640" y="1188720"/>
-            <a:ext cx="2377440" cy="1737360"/>
+            <a:off x="3520440" y="1115568"/>
+            <a:ext cx="164592" cy="146304"/>
           </a:xfrm>
           <a:prstGeom prst="roundRect">
             <a:avLst>
-              <a:gd name="adj" fmla="val 10526"/>
+              <a:gd name="adj" fmla="val 31250"/>
+            </a:avLst>
+          </a:prstGeom>
+          <a:solidFill>
+            <a:schemeClr val="accent4"/>
+          </a:solidFill>
+          <a:ln/>
+        </p:spPr>
+      </p:sp>
+      <p:sp>
+        <p:nvSpPr>
+          <p:cNvPr id="5" name="leg5"/>
+          <p:cNvSpPr txBox="1"/>
+          <p:nvPr/>
+        </p:nvSpPr>
+        <p:spPr>
+          <a:xfrm>
+            <a:off x="4892040" y="1051560"/>
+            <a:ext cx="822960" cy="274320"/>
+          </a:xfrm>
+          <a:prstGeom prst="rect">
+            <a:avLst/>
+          </a:prstGeom>
+          <a:noFill/>
+          <a:ln/>
+        </p:spPr>
+        <p:txBody>
+          <a:bodyPr wrap="square" lIns="0" tIns="0" rIns="0" bIns="0" rtlCol="0" anchor="ctr"/>
+          <a:lstStyle/>
+          <a:p>
+            <a:pPr indent="0" marL="0">
+              <a:buNone/>
+            </a:pPr>
+            <a:r>
+              <a:rPr lang="en-US" sz="1100" b="1" dirty="0">
+                <a:solidFill>
+                  <a:schemeClr val="accent5"/>
+                </a:solidFill>
+              </a:rPr>
+              <a:t>5세대</a:t>
+            </a:r>
+            <a:endParaRPr lang="en-US" sz="1100" dirty="0"/>
+          </a:p>
+        </p:txBody>
+      </p:sp>
+      <p:sp>
+        <p:nvSpPr>
+          <p:cNvPr id="6" name="leg5-sw"/>
+          <p:cNvSpPr/>
+          <p:nvPr/>
+        </p:nvSpPr>
+        <p:spPr>
+          <a:xfrm>
+            <a:off x="4663440" y="1115568"/>
+            <a:ext cx="164592" cy="146304"/>
+          </a:xfrm>
+          <a:prstGeom prst="roundRect">
+            <a:avLst>
+              <a:gd name="adj" fmla="val 31250"/>
+            </a:avLst>
+          </a:prstGeom>
+          <a:solidFill>
+            <a:schemeClr val="accent5"/>
+          </a:solidFill>
+          <a:ln/>
+        </p:spPr>
+      </p:sp>
+      <p:sp>
+        <p:nvSpPr>
+          <p:cNvPr id="7" name="gen-card-0"/>
+          <p:cNvSpPr/>
+          <p:nvPr/>
+        </p:nvSpPr>
+        <p:spPr>
+          <a:xfrm>
+            <a:off x="548640" y="1371600"/>
+            <a:ext cx="8046720" cy="749808"/>
+          </a:xfrm>
+          <a:prstGeom prst="roundRect">
+            <a:avLst>
+              <a:gd name="adj" fmla="val 18293"/>
             </a:avLst>
           </a:prstGeom>
           <a:solidFill>
@@ -6198,71 +6674,49 @@
       </p:sp>
       <p:sp>
         <p:nvSpPr>
-          <p:cNvPr id="4" name="step-num-0"/>
-          <p:cNvSpPr txBox="1"/>
-          <p:nvPr/>
-        </p:nvSpPr>
-        <p:spPr>
-          <a:xfrm>
-            <a:off x="777240" y="1371600"/>
-            <a:ext cx="1920240" cy="594360"/>
-          </a:xfrm>
-          <a:prstGeom prst="rect">
-            <a:avLst/>
-          </a:prstGeom>
-          <a:noFill/>
-          <a:ln/>
-        </p:spPr>
-        <p:txBody>
-          <a:bodyPr wrap="square" lIns="0" tIns="0" rIns="0" bIns="0" rtlCol="0" anchor="ctr"/>
-          <a:lstStyle/>
-          <a:p>
-            <a:pPr indent="0" marL="0">
-              <a:buNone/>
-            </a:pPr>
-            <a:r>
-              <a:rPr lang="en-US" sz="2600" b="1" dirty="0">
+          <p:cNvPr id="8" name="gen-name-0"/>
+          <p:cNvSpPr txBox="1"/>
+          <p:nvPr/>
+        </p:nvSpPr>
+        <p:spPr>
+          <a:xfrm>
+            <a:off x="731520" y="1463040"/>
+            <a:ext cx="2651760" cy="594360"/>
+          </a:xfrm>
+          <a:prstGeom prst="rect">
+            <a:avLst/>
+          </a:prstGeom>
+          <a:noFill/>
+          <a:ln/>
+        </p:spPr>
+        <p:txBody>
+          <a:bodyPr wrap="square" lIns="0" tIns="0" rIns="0" bIns="0" rtlCol="0" anchor="ctr"/>
+          <a:lstStyle/>
+          <a:p>
+            <a:pPr indent="0" marL="0">
+              <a:buNone/>
+            </a:pPr>
+            <a:r>
+              <a:rPr lang="en-US" sz="1300" b="1" dirty="0">
                 <a:solidFill>
                   <a:schemeClr val="tx1"/>
                 </a:solidFill>
               </a:rPr>
-              <a:t>1,000만원</a:t>
-            </a:r>
-            <a:endParaRPr lang="en-US" sz="2600" dirty="0"/>
-          </a:p>
-        </p:txBody>
-      </p:sp>
-      <p:sp>
-        <p:nvSpPr>
-          <p:cNvPr id="5" name="step-label-0"/>
-          <p:cNvSpPr txBox="1"/>
-          <p:nvPr/>
-        </p:nvSpPr>
-        <p:spPr>
-          <a:xfrm>
-            <a:off x="777240" y="2057400"/>
-            <a:ext cx="1920240" cy="685800"/>
-          </a:xfrm>
-          <a:prstGeom prst="rect">
-            <a:avLst/>
-          </a:prstGeom>
-          <a:noFill/>
-          <a:ln/>
-        </p:spPr>
-        <p:txBody>
-          <a:bodyPr wrap="square" lIns="0" tIns="0" rIns="0" bIns="0" rtlCol="0" anchor="t"/>
-          <a:lstStyle/>
-          <a:p>
-            <a:pPr indent="0" marL="0">
-              <a:buNone/>
-            </a:pPr>
-            <a:r>
-              <a:rPr lang="en-US" sz="1300" dirty="0">
+              <a:t>전립선암 로봇수술</a:t>
+            </a:r>
+            <a:endParaRPr lang="en-US" sz="1300" dirty="0"/>
+          </a:p>
+          <a:p>
+            <a:pPr indent="0" marL="0">
+              <a:buNone/>
+            </a:pPr>
+            <a:r>
+              <a:rPr lang="en-US" sz="1100" dirty="0">
                 <a:solidFill>
                   <a:schemeClr val="tx2"/>
                 </a:solidFill>
               </a:rPr>
-              <a:t>로봇수술 비용</a:t>
+              <a:t>1,000만원 · 중증 비급여</a:t>
             </a:r>
             <a:endParaRPr lang="en-US" sz="1300" dirty="0"/>
           </a:p>
@@ -6270,54 +6724,170 @@
       </p:sp>
       <p:sp>
         <p:nvSpPr>
-          <p:cNvPr id="6" name="step-arrow-0"/>
-          <p:cNvSpPr txBox="1"/>
-          <p:nvPr/>
-        </p:nvSpPr>
-        <p:spPr>
-          <a:xfrm>
-            <a:off x="2926080" y="1828800"/>
-            <a:ext cx="365760" cy="457200"/>
-          </a:xfrm>
-          <a:prstGeom prst="rect">
-            <a:avLst/>
-          </a:prstGeom>
-          <a:noFill/>
-          <a:ln/>
-        </p:spPr>
-        <p:txBody>
-          <a:bodyPr wrap="square" lIns="0" tIns="0" rIns="0" bIns="0" rtlCol="0" anchor="ctr"/>
-          <a:lstStyle/>
-          <a:p>
-            <a:pPr algn="ctr" indent="0" marL="0">
-              <a:buNone/>
-            </a:pPr>
-            <a:r>
-              <a:rPr lang="en-US" sz="2000" b="1" dirty="0">
-                <a:solidFill>
-                  <a:schemeClr val="accent3"/>
-                </a:solidFill>
-              </a:rPr>
-              <a:t>→</a:t>
-            </a:r>
-            <a:endParaRPr lang="en-US" sz="2000" dirty="0"/>
-          </a:p>
-        </p:txBody>
-      </p:sp>
-      <p:sp>
-        <p:nvSpPr>
-          <p:cNvPr id="7" name="step-card-1"/>
+          <p:cNvPr id="9" name="gen-bar-0-0"/>
           <p:cNvSpPr/>
           <p:nvPr/>
         </p:nvSpPr>
         <p:spPr>
           <a:xfrm>
-            <a:off x="3291840" y="1188720"/>
-            <a:ext cx="2377440" cy="1737360"/>
+            <a:off x="3520440" y="1527048"/>
+            <a:ext cx="2057400" cy="182880"/>
           </a:xfrm>
           <a:prstGeom prst="roundRect">
             <a:avLst>
-              <a:gd name="adj" fmla="val 10526"/>
+              <a:gd name="adj" fmla="val 30000"/>
+            </a:avLst>
+          </a:prstGeom>
+          <a:solidFill>
+            <a:schemeClr val="accent4"/>
+          </a:solidFill>
+          <a:ln/>
+        </p:spPr>
+      </p:sp>
+      <p:sp>
+        <p:nvSpPr>
+          <p:cNvPr id="10" name="gen-val-0-0"/>
+          <p:cNvSpPr txBox="1"/>
+          <p:nvPr/>
+        </p:nvSpPr>
+        <p:spPr>
+          <a:xfrm>
+            <a:off x="5650992" y="1490472"/>
+            <a:ext cx="822960" cy="256032"/>
+          </a:xfrm>
+          <a:prstGeom prst="rect">
+            <a:avLst/>
+          </a:prstGeom>
+          <a:noFill/>
+          <a:ln/>
+        </p:spPr>
+        <p:txBody>
+          <a:bodyPr wrap="square" lIns="0" tIns="0" rIns="0" bIns="0" rtlCol="0" anchor="ctr"/>
+          <a:lstStyle/>
+          <a:p>
+            <a:pPr indent="0" marL="0">
+              <a:buNone/>
+            </a:pPr>
+            <a:r>
+              <a:rPr lang="en-US" sz="1100" b="1" dirty="0">
+                <a:solidFill>
+                  <a:schemeClr val="tx2"/>
+                </a:solidFill>
+              </a:rPr>
+              <a:t>300만원</a:t>
+            </a:r>
+            <a:endParaRPr lang="en-US" sz="1100" dirty="0"/>
+          </a:p>
+        </p:txBody>
+      </p:sp>
+      <p:sp>
+        <p:nvSpPr>
+          <p:cNvPr id="11" name="gen-bar-0-1"/>
+          <p:cNvSpPr/>
+          <p:nvPr/>
+        </p:nvSpPr>
+        <p:spPr>
+          <a:xfrm>
+            <a:off x="3520440" y="1801368"/>
+            <a:ext cx="2057400" cy="182880"/>
+          </a:xfrm>
+          <a:prstGeom prst="roundRect">
+            <a:avLst>
+              <a:gd name="adj" fmla="val 30000"/>
+            </a:avLst>
+          </a:prstGeom>
+          <a:solidFill>
+            <a:schemeClr val="accent5"/>
+          </a:solidFill>
+          <a:ln/>
+        </p:spPr>
+      </p:sp>
+      <p:sp>
+        <p:nvSpPr>
+          <p:cNvPr id="12" name="gen-val-0-1"/>
+          <p:cNvSpPr txBox="1"/>
+          <p:nvPr/>
+        </p:nvSpPr>
+        <p:spPr>
+          <a:xfrm>
+            <a:off x="5650992" y="1764792"/>
+            <a:ext cx="822960" cy="256032"/>
+          </a:xfrm>
+          <a:prstGeom prst="rect">
+            <a:avLst/>
+          </a:prstGeom>
+          <a:noFill/>
+          <a:ln/>
+        </p:spPr>
+        <p:txBody>
+          <a:bodyPr wrap="square" lIns="0" tIns="0" rIns="0" bIns="0" rtlCol="0" anchor="ctr"/>
+          <a:lstStyle/>
+          <a:p>
+            <a:pPr indent="0" marL="0">
+              <a:buNone/>
+            </a:pPr>
+            <a:r>
+              <a:rPr lang="en-US" sz="1100" b="1" dirty="0">
+                <a:solidFill>
+                  <a:schemeClr val="accent5"/>
+                </a:solidFill>
+              </a:rPr>
+              <a:t>300만원</a:t>
+            </a:r>
+            <a:endParaRPr lang="en-US" sz="1100" dirty="0"/>
+          </a:p>
+        </p:txBody>
+      </p:sp>
+      <p:sp>
+        <p:nvSpPr>
+          <p:cNvPr id="13" name="gen-note-0"/>
+          <p:cNvSpPr txBox="1"/>
+          <p:nvPr/>
+        </p:nvSpPr>
+        <p:spPr>
+          <a:xfrm>
+            <a:off x="6949440" y="1444752"/>
+            <a:ext cx="1508760" cy="594360"/>
+          </a:xfrm>
+          <a:prstGeom prst="rect">
+            <a:avLst/>
+          </a:prstGeom>
+          <a:noFill/>
+          <a:ln/>
+        </p:spPr>
+        <p:txBody>
+          <a:bodyPr wrap="square" lIns="0" tIns="0" rIns="0" bIns="0" rtlCol="0" anchor="ctr"/>
+          <a:lstStyle/>
+          <a:p>
+            <a:pPr algn="r" indent="0" marL="0">
+              <a:buNone/>
+            </a:pPr>
+            <a:r>
+              <a:rPr lang="en-US" sz="1400" b="1" dirty="0">
+                <a:solidFill>
+                  <a:schemeClr val="tx2"/>
+                </a:solidFill>
+              </a:rPr>
+              <a:t>30% 그대로</a:t>
+            </a:r>
+            <a:endParaRPr lang="en-US" sz="1400" dirty="0"/>
+          </a:p>
+        </p:txBody>
+      </p:sp>
+      <p:sp>
+        <p:nvSpPr>
+          <p:cNvPr id="14" name="gen-card-1"/>
+          <p:cNvSpPr/>
+          <p:nvPr/>
+        </p:nvSpPr>
+        <p:spPr>
+          <a:xfrm>
+            <a:off x="548640" y="2240280"/>
+            <a:ext cx="8046720" cy="749808"/>
+          </a:xfrm>
+          <a:prstGeom prst="roundRect">
+            <a:avLst>
+              <a:gd name="adj" fmla="val 18293"/>
             </a:avLst>
           </a:prstGeom>
           <a:solidFill>
@@ -6328,194 +6898,440 @@
       </p:sp>
       <p:sp>
         <p:nvSpPr>
-          <p:cNvPr id="8" name="step-num-1"/>
-          <p:cNvSpPr txBox="1"/>
-          <p:nvPr/>
-        </p:nvSpPr>
-        <p:spPr>
-          <a:xfrm>
-            <a:off x="3520440" y="1371600"/>
-            <a:ext cx="1920240" cy="594360"/>
-          </a:xfrm>
-          <a:prstGeom prst="rect">
-            <a:avLst/>
-          </a:prstGeom>
-          <a:noFill/>
-          <a:ln/>
-        </p:spPr>
-        <p:txBody>
-          <a:bodyPr wrap="square" lIns="0" tIns="0" rIns="0" bIns="0" rtlCol="0" anchor="ctr"/>
-          <a:lstStyle/>
-          <a:p>
-            <a:pPr indent="0" marL="0">
-              <a:buNone/>
-            </a:pPr>
-            <a:r>
-              <a:rPr lang="en-US" sz="2600" b="1" dirty="0">
-                <a:solidFill>
-                  <a:schemeClr val="accent5"/>
-                </a:solidFill>
-              </a:rPr>
-              <a:t>300만원</a:t>
-            </a:r>
-            <a:endParaRPr lang="en-US" sz="2600" dirty="0"/>
-          </a:p>
-        </p:txBody>
-      </p:sp>
-      <p:sp>
-        <p:nvSpPr>
-          <p:cNvPr id="9" name="step-label-1"/>
-          <p:cNvSpPr txBox="1"/>
-          <p:nvPr/>
-        </p:nvSpPr>
-        <p:spPr>
-          <a:xfrm>
-            <a:off x="3520440" y="2057400"/>
-            <a:ext cx="1920240" cy="685800"/>
-          </a:xfrm>
-          <a:prstGeom prst="rect">
-            <a:avLst/>
-          </a:prstGeom>
-          <a:noFill/>
-          <a:ln/>
-        </p:spPr>
-        <p:txBody>
-          <a:bodyPr wrap="square" lIns="0" tIns="0" rIns="0" bIns="0" rtlCol="0" anchor="t"/>
-          <a:lstStyle/>
-          <a:p>
-            <a:pPr indent="0" marL="0">
-              <a:buNone/>
-            </a:pPr>
-            <a:r>
-              <a:rPr lang="en-US" sz="1300" dirty="0">
+          <p:cNvPr id="15" name="gen-name-1"/>
+          <p:cNvSpPr txBox="1"/>
+          <p:nvPr/>
+        </p:nvSpPr>
+        <p:spPr>
+          <a:xfrm>
+            <a:off x="731520" y="2331720"/>
+            <a:ext cx="2651760" cy="594360"/>
+          </a:xfrm>
+          <a:prstGeom prst="rect">
+            <a:avLst/>
+          </a:prstGeom>
+          <a:noFill/>
+          <a:ln/>
+        </p:spPr>
+        <p:txBody>
+          <a:bodyPr wrap="square" lIns="0" tIns="0" rIns="0" bIns="0" rtlCol="0" anchor="ctr"/>
+          <a:lstStyle/>
+          <a:p>
+            <a:pPr indent="0" marL="0">
+              <a:buNone/>
+            </a:pPr>
+            <a:r>
+              <a:rPr lang="en-US" sz="1300" b="1" dirty="0">
+                <a:solidFill>
+                  <a:schemeClr val="tx1"/>
+                </a:solidFill>
+              </a:rPr>
+              <a:t>자궁근종 하이푸</a:t>
+            </a:r>
+            <a:endParaRPr lang="en-US" sz="1300" dirty="0"/>
+          </a:p>
+          <a:p>
+            <a:pPr indent="0" marL="0">
+              <a:buNone/>
+            </a:pPr>
+            <a:r>
+              <a:rPr lang="en-US" sz="1100" dirty="0">
                 <a:solidFill>
                   <a:schemeClr val="tx2"/>
                 </a:solidFill>
               </a:rPr>
-              <a:t>4세대 실손 비급여</a:t>
+              <a:t>657만원 · 비중증 비급여</a:t>
             </a:r>
             <a:endParaRPr lang="en-US" sz="1300" dirty="0"/>
           </a:p>
-          <a:p>
-            <a:pPr indent="0" marL="0">
-              <a:buNone/>
-            </a:pPr>
-            <a:r>
-              <a:rPr lang="en-US" sz="1300" dirty="0">
-                <a:solidFill>
-                  <a:schemeClr val="tx2"/>
-                </a:solidFill>
-              </a:rPr>
-              <a:t>자기부담 30%</a:t>
-            </a:r>
-            <a:endParaRPr lang="en-US" sz="1300" dirty="0"/>
-          </a:p>
-        </p:txBody>
-      </p:sp>
-      <p:sp>
-        <p:nvSpPr>
-          <p:cNvPr id="10" name="step-arrow-1"/>
-          <p:cNvSpPr txBox="1"/>
-          <p:nvPr/>
-        </p:nvSpPr>
-        <p:spPr>
-          <a:xfrm>
-            <a:off x="5669280" y="1828800"/>
-            <a:ext cx="365760" cy="457200"/>
-          </a:xfrm>
-          <a:prstGeom prst="rect">
-            <a:avLst/>
-          </a:prstGeom>
-          <a:noFill/>
-          <a:ln/>
-        </p:spPr>
-        <p:txBody>
-          <a:bodyPr wrap="square" lIns="0" tIns="0" rIns="0" bIns="0" rtlCol="0" anchor="ctr"/>
-          <a:lstStyle/>
-          <a:p>
-            <a:pPr algn="ctr" indent="0" marL="0">
-              <a:buNone/>
-            </a:pPr>
-            <a:r>
-              <a:rPr lang="en-US" sz="2000" b="1" dirty="0">
-                <a:solidFill>
-                  <a:schemeClr val="accent3"/>
-                </a:solidFill>
-              </a:rPr>
-              <a:t>→</a:t>
-            </a:r>
-            <a:endParaRPr lang="en-US" sz="2000" dirty="0"/>
-          </a:p>
-        </p:txBody>
-      </p:sp>
-      <p:sp>
-        <p:nvSpPr>
-          <p:cNvPr id="11" name="step-card-2"/>
+        </p:txBody>
+      </p:sp>
+      <p:sp>
+        <p:nvSpPr>
+          <p:cNvPr id="16" name="gen-bar-1-0"/>
           <p:cNvSpPr/>
           <p:nvPr/>
         </p:nvSpPr>
         <p:spPr>
           <a:xfrm>
-            <a:off x="6035040" y="1188720"/>
-            <a:ext cx="2377440" cy="1737360"/>
+            <a:off x="3520440" y="2395728"/>
+            <a:ext cx="1351026" cy="182880"/>
           </a:xfrm>
           <a:prstGeom prst="roundRect">
             <a:avLst>
-              <a:gd name="adj" fmla="val 10526"/>
+              <a:gd name="adj" fmla="val 30000"/>
             </a:avLst>
           </a:prstGeom>
           <a:solidFill>
-            <a:schemeClr val="accent2"/>
+            <a:schemeClr val="accent4"/>
           </a:solidFill>
           <a:ln/>
         </p:spPr>
       </p:sp>
       <p:sp>
         <p:nvSpPr>
-          <p:cNvPr id="12" name="step-num-2"/>
-          <p:cNvSpPr txBox="1"/>
-          <p:nvPr/>
-        </p:nvSpPr>
-        <p:spPr>
-          <a:xfrm>
-            <a:off x="6263640" y="1371600"/>
-            <a:ext cx="1920240" cy="594360"/>
-          </a:xfrm>
-          <a:prstGeom prst="rect">
-            <a:avLst/>
-          </a:prstGeom>
-          <a:noFill/>
-          <a:ln/>
-        </p:spPr>
-        <p:txBody>
-          <a:bodyPr wrap="square" lIns="0" tIns="0" rIns="0" bIns="0" rtlCol="0" anchor="ctr"/>
-          <a:lstStyle/>
-          <a:p>
-            <a:pPr indent="0" marL="0">
-              <a:buNone/>
-            </a:pPr>
-            <a:r>
-              <a:rPr lang="en-US" sz="2600" b="1" dirty="0">
-                <a:solidFill>
-                  <a:schemeClr val="accent1"/>
-                </a:solidFill>
-              </a:rPr>
-              <a:t>정액 수술비</a:t>
-            </a:r>
-            <a:endParaRPr lang="en-US" sz="2600" dirty="0"/>
-          </a:p>
-        </p:txBody>
-      </p:sp>
-      <p:sp>
-        <p:nvSpPr>
-          <p:cNvPr id="13" name="step-label-2"/>
-          <p:cNvSpPr txBox="1"/>
-          <p:nvPr/>
-        </p:nvSpPr>
-        <p:spPr>
-          <a:xfrm>
-            <a:off x="6263640" y="2057400"/>
-            <a:ext cx="1920240" cy="685800"/>
+          <p:cNvPr id="17" name="gen-val-1-0"/>
+          <p:cNvSpPr txBox="1"/>
+          <p:nvPr/>
+        </p:nvSpPr>
+        <p:spPr>
+          <a:xfrm>
+            <a:off x="4944618" y="2359152"/>
+            <a:ext cx="822960" cy="256032"/>
+          </a:xfrm>
+          <a:prstGeom prst="rect">
+            <a:avLst/>
+          </a:prstGeom>
+          <a:noFill/>
+          <a:ln/>
+        </p:spPr>
+        <p:txBody>
+          <a:bodyPr wrap="square" lIns="0" tIns="0" rIns="0" bIns="0" rtlCol="0" anchor="ctr"/>
+          <a:lstStyle/>
+          <a:p>
+            <a:pPr indent="0" marL="0">
+              <a:buNone/>
+            </a:pPr>
+            <a:r>
+              <a:rPr lang="en-US" sz="1100" b="1" dirty="0">
+                <a:solidFill>
+                  <a:schemeClr val="tx2"/>
+                </a:solidFill>
+              </a:rPr>
+              <a:t>197만원</a:t>
+            </a:r>
+            <a:endParaRPr lang="en-US" sz="1100" dirty="0"/>
+          </a:p>
+        </p:txBody>
+      </p:sp>
+      <p:sp>
+        <p:nvSpPr>
+          <p:cNvPr id="18" name="gen-bar-1-1"/>
+          <p:cNvSpPr/>
+          <p:nvPr/>
+        </p:nvSpPr>
+        <p:spPr>
+          <a:xfrm>
+            <a:off x="3520440" y="2670048"/>
+            <a:ext cx="2256282" cy="182880"/>
+          </a:xfrm>
+          <a:prstGeom prst="roundRect">
+            <a:avLst>
+              <a:gd name="adj" fmla="val 30000"/>
+            </a:avLst>
+          </a:prstGeom>
+          <a:solidFill>
+            <a:schemeClr val="accent5"/>
+          </a:solidFill>
+          <a:ln/>
+        </p:spPr>
+      </p:sp>
+      <p:sp>
+        <p:nvSpPr>
+          <p:cNvPr id="19" name="gen-val-1-1"/>
+          <p:cNvSpPr txBox="1"/>
+          <p:nvPr/>
+        </p:nvSpPr>
+        <p:spPr>
+          <a:xfrm>
+            <a:off x="5849874" y="2633472"/>
+            <a:ext cx="822960" cy="256032"/>
+          </a:xfrm>
+          <a:prstGeom prst="rect">
+            <a:avLst/>
+          </a:prstGeom>
+          <a:noFill/>
+          <a:ln/>
+        </p:spPr>
+        <p:txBody>
+          <a:bodyPr wrap="square" lIns="0" tIns="0" rIns="0" bIns="0" rtlCol="0" anchor="ctr"/>
+          <a:lstStyle/>
+          <a:p>
+            <a:pPr indent="0" marL="0">
+              <a:buNone/>
+            </a:pPr>
+            <a:r>
+              <a:rPr lang="en-US" sz="1100" b="1" dirty="0">
+                <a:solidFill>
+                  <a:schemeClr val="accent5"/>
+                </a:solidFill>
+              </a:rPr>
+              <a:t>329만원</a:t>
+            </a:r>
+            <a:endParaRPr lang="en-US" sz="1100" dirty="0"/>
+          </a:p>
+        </p:txBody>
+      </p:sp>
+      <p:sp>
+        <p:nvSpPr>
+          <p:cNvPr id="20" name="gen-note-1"/>
+          <p:cNvSpPr txBox="1"/>
+          <p:nvPr/>
+        </p:nvSpPr>
+        <p:spPr>
+          <a:xfrm>
+            <a:off x="6949440" y="2313432"/>
+            <a:ext cx="1508760" cy="594360"/>
+          </a:xfrm>
+          <a:prstGeom prst="rect">
+            <a:avLst/>
+          </a:prstGeom>
+          <a:noFill/>
+          <a:ln/>
+        </p:spPr>
+        <p:txBody>
+          <a:bodyPr wrap="square" lIns="0" tIns="0" rIns="0" bIns="0" rtlCol="0" anchor="ctr"/>
+          <a:lstStyle/>
+          <a:p>
+            <a:pPr algn="r" indent="0" marL="0">
+              <a:buNone/>
+            </a:pPr>
+            <a:r>
+              <a:rPr lang="en-US" sz="1400" b="1" dirty="0">
+                <a:solidFill>
+                  <a:schemeClr val="accent5"/>
+                </a:solidFill>
+              </a:rPr>
+              <a:t>+132만원</a:t>
+            </a:r>
+            <a:endParaRPr lang="en-US" sz="1400" dirty="0"/>
+          </a:p>
+        </p:txBody>
+      </p:sp>
+      <p:sp>
+        <p:nvSpPr>
+          <p:cNvPr id="21" name="gen-card-2"/>
+          <p:cNvSpPr/>
+          <p:nvPr/>
+        </p:nvSpPr>
+        <p:spPr>
+          <a:xfrm>
+            <a:off x="548640" y="3108960"/>
+            <a:ext cx="8046720" cy="749808"/>
+          </a:xfrm>
+          <a:prstGeom prst="roundRect">
+            <a:avLst>
+              <a:gd name="adj" fmla="val 18293"/>
+            </a:avLst>
+          </a:prstGeom>
+          <a:solidFill>
+            <a:schemeClr val="bg2"/>
+          </a:solidFill>
+          <a:ln/>
+        </p:spPr>
+      </p:sp>
+      <p:sp>
+        <p:nvSpPr>
+          <p:cNvPr id="22" name="gen-name-2"/>
+          <p:cNvSpPr txBox="1"/>
+          <p:nvPr/>
+        </p:nvSpPr>
+        <p:spPr>
+          <a:xfrm>
+            <a:off x="731520" y="3200400"/>
+            <a:ext cx="2651760" cy="594360"/>
+          </a:xfrm>
+          <a:prstGeom prst="rect">
+            <a:avLst/>
+          </a:prstGeom>
+          <a:noFill/>
+          <a:ln/>
+        </p:spPr>
+        <p:txBody>
+          <a:bodyPr wrap="square" lIns="0" tIns="0" rIns="0" bIns="0" rtlCol="0" anchor="ctr"/>
+          <a:lstStyle/>
+          <a:p>
+            <a:pPr indent="0" marL="0">
+              <a:buNone/>
+            </a:pPr>
+            <a:r>
+              <a:rPr lang="en-US" sz="1300" b="1" dirty="0">
+                <a:solidFill>
+                  <a:schemeClr val="tx1"/>
+                </a:solidFill>
+              </a:rPr>
+              <a:t>전립선 결찰술</a:t>
+            </a:r>
+            <a:endParaRPr lang="en-US" sz="1300" dirty="0"/>
+          </a:p>
+          <a:p>
+            <a:pPr indent="0" marL="0">
+              <a:buNone/>
+            </a:pPr>
+            <a:r>
+              <a:rPr lang="en-US" sz="1100" dirty="0">
+                <a:solidFill>
+                  <a:schemeClr val="tx2"/>
+                </a:solidFill>
+              </a:rPr>
+              <a:t>440만원 · 비중증 비급여</a:t>
+            </a:r>
+            <a:endParaRPr lang="en-US" sz="1300" dirty="0"/>
+          </a:p>
+        </p:txBody>
+      </p:sp>
+      <p:sp>
+        <p:nvSpPr>
+          <p:cNvPr id="23" name="gen-bar-2-0"/>
+          <p:cNvSpPr/>
+          <p:nvPr/>
+        </p:nvSpPr>
+        <p:spPr>
+          <a:xfrm>
+            <a:off x="3520440" y="3264408"/>
+            <a:ext cx="905256" cy="182880"/>
+          </a:xfrm>
+          <a:prstGeom prst="roundRect">
+            <a:avLst>
+              <a:gd name="adj" fmla="val 30000"/>
+            </a:avLst>
+          </a:prstGeom>
+          <a:solidFill>
+            <a:schemeClr val="accent4"/>
+          </a:solidFill>
+          <a:ln/>
+        </p:spPr>
+      </p:sp>
+      <p:sp>
+        <p:nvSpPr>
+          <p:cNvPr id="24" name="gen-val-2-0"/>
+          <p:cNvSpPr txBox="1"/>
+          <p:nvPr/>
+        </p:nvSpPr>
+        <p:spPr>
+          <a:xfrm>
+            <a:off x="4498848" y="3227832"/>
+            <a:ext cx="822960" cy="256032"/>
+          </a:xfrm>
+          <a:prstGeom prst="rect">
+            <a:avLst/>
+          </a:prstGeom>
+          <a:noFill/>
+          <a:ln/>
+        </p:spPr>
+        <p:txBody>
+          <a:bodyPr wrap="square" lIns="0" tIns="0" rIns="0" bIns="0" rtlCol="0" anchor="ctr"/>
+          <a:lstStyle/>
+          <a:p>
+            <a:pPr indent="0" marL="0">
+              <a:buNone/>
+            </a:pPr>
+            <a:r>
+              <a:rPr lang="en-US" sz="1100" b="1" dirty="0">
+                <a:solidFill>
+                  <a:schemeClr val="tx2"/>
+                </a:solidFill>
+              </a:rPr>
+              <a:t>132만원</a:t>
+            </a:r>
+            <a:endParaRPr lang="en-US" sz="1100" dirty="0"/>
+          </a:p>
+        </p:txBody>
+      </p:sp>
+      <p:sp>
+        <p:nvSpPr>
+          <p:cNvPr id="25" name="gen-bar-2-1"/>
+          <p:cNvSpPr/>
+          <p:nvPr/>
+        </p:nvSpPr>
+        <p:spPr>
+          <a:xfrm>
+            <a:off x="3520440" y="3538728"/>
+            <a:ext cx="1508760" cy="182880"/>
+          </a:xfrm>
+          <a:prstGeom prst="roundRect">
+            <a:avLst>
+              <a:gd name="adj" fmla="val 30000"/>
+            </a:avLst>
+          </a:prstGeom>
+          <a:solidFill>
+            <a:schemeClr val="accent5"/>
+          </a:solidFill>
+          <a:ln/>
+        </p:spPr>
+      </p:sp>
+      <p:sp>
+        <p:nvSpPr>
+          <p:cNvPr id="26" name="gen-val-2-1"/>
+          <p:cNvSpPr txBox="1"/>
+          <p:nvPr/>
+        </p:nvSpPr>
+        <p:spPr>
+          <a:xfrm>
+            <a:off x="5102352" y="3502152"/>
+            <a:ext cx="822960" cy="256032"/>
+          </a:xfrm>
+          <a:prstGeom prst="rect">
+            <a:avLst/>
+          </a:prstGeom>
+          <a:noFill/>
+          <a:ln/>
+        </p:spPr>
+        <p:txBody>
+          <a:bodyPr wrap="square" lIns="0" tIns="0" rIns="0" bIns="0" rtlCol="0" anchor="ctr"/>
+          <a:lstStyle/>
+          <a:p>
+            <a:pPr indent="0" marL="0">
+              <a:buNone/>
+            </a:pPr>
+            <a:r>
+              <a:rPr lang="en-US" sz="1100" b="1" dirty="0">
+                <a:solidFill>
+                  <a:schemeClr val="accent5"/>
+                </a:solidFill>
+              </a:rPr>
+              <a:t>220만원</a:t>
+            </a:r>
+            <a:endParaRPr lang="en-US" sz="1100" dirty="0"/>
+          </a:p>
+        </p:txBody>
+      </p:sp>
+      <p:sp>
+        <p:nvSpPr>
+          <p:cNvPr id="27" name="gen-note-2"/>
+          <p:cNvSpPr txBox="1"/>
+          <p:nvPr/>
+        </p:nvSpPr>
+        <p:spPr>
+          <a:xfrm>
+            <a:off x="6949440" y="3182112"/>
+            <a:ext cx="1508760" cy="594360"/>
+          </a:xfrm>
+          <a:prstGeom prst="rect">
+            <a:avLst/>
+          </a:prstGeom>
+          <a:noFill/>
+          <a:ln/>
+        </p:spPr>
+        <p:txBody>
+          <a:bodyPr wrap="square" lIns="0" tIns="0" rIns="0" bIns="0" rtlCol="0" anchor="ctr"/>
+          <a:lstStyle/>
+          <a:p>
+            <a:pPr algn="r" indent="0" marL="0">
+              <a:buNone/>
+            </a:pPr>
+            <a:r>
+              <a:rPr lang="en-US" sz="1400" b="1" dirty="0">
+                <a:solidFill>
+                  <a:schemeClr val="accent5"/>
+                </a:solidFill>
+              </a:rPr>
+              <a:t>+88만원</a:t>
+            </a:r>
+            <a:endParaRPr lang="en-US" sz="1400" dirty="0"/>
+          </a:p>
+        </p:txBody>
+      </p:sp>
+      <p:sp>
+        <p:nvSpPr>
+          <p:cNvPr id="28" name="gen-rule"/>
+          <p:cNvSpPr txBox="1"/>
+          <p:nvPr/>
+        </p:nvSpPr>
+        <p:spPr>
+          <a:xfrm>
+            <a:off x="548640" y="3995928"/>
+            <a:ext cx="8046720" cy="384048"/>
           </a:xfrm>
           <a:prstGeom prst="rect">
             <a:avLst/>
@@ -6531,89 +7347,20 @@
               <a:buNone/>
             </a:pPr>
             <a:r>
-              <a:rPr lang="en-US" sz="1300" dirty="0">
+              <a:rPr lang="en-US" sz="1000" dirty="0">
                 <a:solidFill>
                   <a:schemeClr val="tx2"/>
                 </a:solidFill>
               </a:rPr>
-              <a:t>실손과 별개로</a:t>
-            </a:r>
-            <a:endParaRPr lang="en-US" sz="1300" dirty="0"/>
-          </a:p>
-          <a:p>
-            <a:pPr indent="0" marL="0">
-              <a:buNone/>
-            </a:pPr>
-            <a:r>
-              <a:rPr lang="en-US" sz="1300" dirty="0">
-                <a:solidFill>
-                  <a:schemeClr val="tx2"/>
-                </a:solidFill>
-              </a:rPr>
-              <a:t>정해진 금액 지급</a:t>
-            </a:r>
-            <a:endParaRPr lang="en-US" sz="1300" dirty="0"/>
-          </a:p>
-        </p:txBody>
-      </p:sp>
-      <p:sp>
-        <p:nvSpPr>
-          <p:cNvPr id="14" name="sales-bullets"/>
-          <p:cNvSpPr txBox="1"/>
-          <p:nvPr/>
-        </p:nvSpPr>
-        <p:spPr>
-          <a:xfrm>
-            <a:off x="548640" y="3154680"/>
-            <a:ext cx="8046720" cy="1097280"/>
-          </a:xfrm>
-          <a:prstGeom prst="rect">
-            <a:avLst/>
-          </a:prstGeom>
-          <a:noFill/>
-          <a:ln/>
-        </p:spPr>
-        <p:txBody>
-          <a:bodyPr wrap="square" lIns="0" tIns="0" rIns="0" bIns="0" rtlCol="0" anchor="t"/>
-          <a:lstStyle/>
-          <a:p>
-            <a:pPr marL="342900" indent="-342900">
-              <a:spcAft>
-                <a:spcPts val="600"/>
-              </a:spcAft>
-              <a:buSzPct val="100000"/>
-              <a:buChar char="•"/>
-            </a:pPr>
-            <a:r>
-              <a:rPr lang="en-US" sz="1300" dirty="0">
-                <a:solidFill>
-                  <a:schemeClr val="tx1"/>
-                </a:solidFill>
-              </a:rPr>
-              <a:t>비급여 수술은 가격이 병원마다 수 배씩 달라요. 실손은 쓴 만큼 돌려주지만 비급여는 본인 몫이 크게 남아요.</a:t>
-            </a:r>
-            <a:endParaRPr lang="en-US" sz="1300" dirty="0"/>
-          </a:p>
-          <a:p>
-            <a:pPr marL="342900" indent="-342900">
-              <a:buSzPct val="100000"/>
-              <a:buChar char="•"/>
-            </a:pPr>
-            <a:r>
-              <a:rPr lang="en-US" sz="1300" dirty="0">
-                <a:solidFill>
-                  <a:schemeClr val="tx1"/>
-                </a:solidFill>
-              </a:rPr>
-              <a:t>고객 병명(앞 장)으로 해당 수술을 짚고, 정액 수술비 특약으로 남는 부담을 채우는 흐름으로 안내해 보세요.</a:t>
-            </a:r>
-            <a:endParaRPr lang="en-US" sz="1300" dirty="0"/>
-          </a:p>
-        </p:txBody>
-      </p:sp>
-      <p:sp>
-        <p:nvSpPr>
-          <p:cNvPr id="15" name="source"/>
+              <a:t>5세대(2026.5.6 출시): 비중증 비급여 자기부담 30→50%, 연간 한도 5,000→1,000만원 · 중증(암·뇌·심장·희귀난치 산정특례)은 30% 유지, 입원 본인부담 연 500만원 상한</a:t>
+            </a:r>
+            <a:endParaRPr lang="en-US" sz="1000" dirty="0"/>
+          </a:p>
+        </p:txBody>
+      </p:sp>
+      <p:sp>
+        <p:nvSpPr>
+          <p:cNvPr id="29" name="source"/>
           <p:cNvSpPr txBox="1"/>
           <p:nvPr/>
         </p:nvSpPr>
@@ -6641,7 +7388,7 @@
                   <a:schemeClr val="accent3"/>
                 </a:solidFill>
               </a:rPr>
-              <a:t>가정값: 1,000만원 × 30% 단순 계산(연간 한도·최소공제·세대별 차이 미반영). 실제 지급은 가입 약관 기준</a:t>
+              <a:t>가정값: 입원·보장 대상 가정, 한도·공제 미반영. 출처: 금융위원회, 「5세대 실손 6일 출시」 보도(2026.5)</a:t>
             </a:r>
             <a:endParaRPr lang="en-US" sz="900" dirty="0"/>
           </a:p>
@@ -6749,7 +7496,7 @@
                   <a:schemeClr val="tx1"/>
                 </a:solidFill>
               </a:rPr>
-              <a:t>자료 출처와 읽는 법</a:t>
+              <a:t>실손이 줄어든 자리, 수술비가 채워요</a:t>
             </a:r>
             <a:endParaRPr lang="en-US" sz="2600" dirty="0"/>
           </a:p>
@@ -6757,14 +7504,80 @@
       </p:sp>
       <p:sp>
         <p:nvSpPr>
-          <p:cNvPr id="3" name="sources"/>
-          <p:cNvSpPr txBox="1"/>
+          <p:cNvPr id="3" name="kind-card-0"/>
+          <p:cNvSpPr/>
           <p:nvPr/>
         </p:nvSpPr>
         <p:spPr>
           <a:xfrm>
             <a:off x="548640" y="1143000"/>
-            <a:ext cx="4937760" cy="3017520"/>
+            <a:ext cx="2514600" cy="2743200"/>
+          </a:xfrm>
+          <a:prstGeom prst="roundRect">
+            <a:avLst>
+              <a:gd name="adj" fmla="val 7273"/>
+            </a:avLst>
+          </a:prstGeom>
+          <a:solidFill>
+            <a:schemeClr val="bg2"/>
+          </a:solidFill>
+          <a:ln/>
+        </p:spPr>
+      </p:sp>
+      <p:sp>
+        <p:nvSpPr>
+          <p:cNvPr id="4" name="kind-dot-0"/>
+          <p:cNvSpPr/>
+          <p:nvPr/>
+        </p:nvSpPr>
+        <p:spPr>
+          <a:xfrm>
+            <a:off x="777240" y="1371600"/>
+            <a:ext cx="502920" cy="502920"/>
+          </a:xfrm>
+          <a:prstGeom prst="ellipse">
+            <a:avLst/>
+          </a:prstGeom>
+          <a:solidFill>
+            <a:schemeClr val="bg1"/>
+          </a:solidFill>
+          <a:ln/>
+        </p:spPr>
+      </p:sp>
+      <p:pic>
+        <p:nvPicPr>
+          <p:cNvPr id="5" name="kind-icon-0" descr="preencoded.png">    </p:cNvPr>
+          <p:cNvPicPr>
+            <a:picLocks noChangeAspect="1"/>
+          </p:cNvPicPr>
+          <p:nvPr/>
+        </p:nvPicPr>
+        <p:blipFill>
+          <a:blip r:embed="rId1"/>
+          <a:stretch>
+            <a:fillRect/>
+          </a:stretch>
+        </p:blipFill>
+        <p:spPr>
+          <a:xfrm>
+            <a:off x="905256" y="1499616"/>
+            <a:ext cx="246888" cy="246888"/>
+          </a:xfrm>
+          <a:prstGeom prst="rect">
+            <a:avLst/>
+          </a:prstGeom>
+        </p:spPr>
+      </p:pic>
+      <p:sp>
+        <p:nvSpPr>
+          <p:cNvPr id="6" name="kind-text-0"/>
+          <p:cNvSpPr txBox="1"/>
+          <p:nvPr/>
+        </p:nvSpPr>
+        <p:spPr>
+          <a:xfrm>
+            <a:off x="777240" y="2011680"/>
+            <a:ext cx="2103120" cy="1783080"/>
           </a:xfrm>
           <a:prstGeom prst="rect">
             <a:avLst/>
@@ -6776,180 +7589,387 @@
           <a:bodyPr wrap="square" lIns="0" tIns="0" rIns="0" bIns="0" rtlCol="0" anchor="t"/>
           <a:lstStyle/>
           <a:p>
-            <a:pPr marL="342900" indent="-342900">
+            <a:pPr indent="0" marL="0">
+              <a:buNone/>
+            </a:pPr>
+            <a:r>
+              <a:rPr lang="en-US" sz="1500" b="1" dirty="0">
+                <a:solidFill>
+                  <a:schemeClr val="tx1"/>
+                </a:solidFill>
+              </a:rPr>
+              <a:t>실손보험</a:t>
+            </a:r>
+            <a:endParaRPr lang="en-US" sz="1500" dirty="0"/>
+          </a:p>
+          <a:p>
+            <a:pPr indent="0" marL="0">
               <a:spcAft>
                 <a:spcPts val="800"/>
               </a:spcAft>
-              <a:buSzPct val="100000"/>
-              <a:buChar char="•"/>
-            </a:pPr>
-            <a:r>
-              <a:rPr lang="en-US" sz="1300" dirty="0">
+              <a:buNone/>
+            </a:pPr>
+            <a:r>
+              <a:rPr lang="en-US" sz="1200" b="1" dirty="0">
+                <a:solidFill>
+                  <a:schemeClr val="tx2"/>
+                </a:solidFill>
+              </a:rPr>
+              <a:t>쓴 만큼 돌려받아요</a:t>
+            </a:r>
+            <a:endParaRPr lang="en-US" sz="1500" dirty="0"/>
+          </a:p>
+          <a:p>
+            <a:pPr indent="0" marL="0">
+              <a:buNone/>
+            </a:pPr>
+            <a:r>
+              <a:rPr lang="en-US" sz="1200" dirty="0">
                 <a:solidFill>
                   <a:schemeClr val="tx1"/>
                 </a:solidFill>
               </a:rPr>
-              <a:t>보건복지부·심평원 비급여 진료비용 공개 (2022·2025·2026 발표)</a:t>
-            </a:r>
-            <a:endParaRPr lang="en-US" sz="1300" dirty="0"/>
-          </a:p>
-          <a:p>
-            <a:pPr marL="342900" indent="-342900">
+              <a:t>5세대는 비중증 비급여 본인부담 50%. 수술비가 비쌀수록 남는 돈도 커져요.</a:t>
+            </a:r>
+            <a:endParaRPr lang="en-US" sz="1500" dirty="0"/>
+          </a:p>
+        </p:txBody>
+      </p:sp>
+      <p:sp>
+        <p:nvSpPr>
+          <p:cNvPr id="7" name="kind-card-1"/>
+          <p:cNvSpPr/>
+          <p:nvPr/>
+        </p:nvSpPr>
+        <p:spPr>
+          <a:xfrm>
+            <a:off x="3291840" y="1143000"/>
+            <a:ext cx="2514600" cy="2743200"/>
+          </a:xfrm>
+          <a:prstGeom prst="roundRect">
+            <a:avLst>
+              <a:gd name="adj" fmla="val 7273"/>
+            </a:avLst>
+          </a:prstGeom>
+          <a:solidFill>
+            <a:schemeClr val="accent2"/>
+          </a:solidFill>
+          <a:ln/>
+        </p:spPr>
+      </p:sp>
+      <p:sp>
+        <p:nvSpPr>
+          <p:cNvPr id="8" name="kind-dot-1"/>
+          <p:cNvSpPr/>
+          <p:nvPr/>
+        </p:nvSpPr>
+        <p:spPr>
+          <a:xfrm>
+            <a:off x="3520440" y="1371600"/>
+            <a:ext cx="502920" cy="502920"/>
+          </a:xfrm>
+          <a:prstGeom prst="ellipse">
+            <a:avLst/>
+          </a:prstGeom>
+          <a:solidFill>
+            <a:schemeClr val="accent1"/>
+          </a:solidFill>
+          <a:ln/>
+        </p:spPr>
+      </p:sp>
+      <p:pic>
+        <p:nvPicPr>
+          <p:cNvPr id="9" name="kind-icon-1" descr="preencoded.png">    </p:cNvPr>
+          <p:cNvPicPr>
+            <a:picLocks noChangeAspect="1"/>
+          </p:cNvPicPr>
+          <p:nvPr/>
+        </p:nvPicPr>
+        <p:blipFill>
+          <a:blip r:embed="rId2"/>
+          <a:stretch>
+            <a:fillRect/>
+          </a:stretch>
+        </p:blipFill>
+        <p:spPr>
+          <a:xfrm>
+            <a:off x="3648456" y="1499616"/>
+            <a:ext cx="246888" cy="246888"/>
+          </a:xfrm>
+          <a:prstGeom prst="rect">
+            <a:avLst/>
+          </a:prstGeom>
+        </p:spPr>
+      </p:pic>
+      <p:sp>
+        <p:nvSpPr>
+          <p:cNvPr id="10" name="kind-text-1"/>
+          <p:cNvSpPr txBox="1"/>
+          <p:nvPr/>
+        </p:nvSpPr>
+        <p:spPr>
+          <a:xfrm>
+            <a:off x="3520440" y="2011680"/>
+            <a:ext cx="2103120" cy="1783080"/>
+          </a:xfrm>
+          <a:prstGeom prst="rect">
+            <a:avLst/>
+          </a:prstGeom>
+          <a:noFill/>
+          <a:ln/>
+        </p:spPr>
+        <p:txBody>
+          <a:bodyPr wrap="square" lIns="0" tIns="0" rIns="0" bIns="0" rtlCol="0" anchor="t"/>
+          <a:lstStyle/>
+          <a:p>
+            <a:pPr indent="0" marL="0">
+              <a:buNone/>
+            </a:pPr>
+            <a:r>
+              <a:rPr lang="en-US" sz="1500" b="1" dirty="0">
+                <a:solidFill>
+                  <a:schemeClr val="accent1"/>
+                </a:solidFill>
+              </a:rPr>
+              <a:t>1-5종 수술비</a:t>
+            </a:r>
+            <a:endParaRPr lang="en-US" sz="1500" dirty="0"/>
+          </a:p>
+          <a:p>
+            <a:pPr indent="0" marL="0">
               <a:spcAft>
                 <a:spcPts val="800"/>
               </a:spcAft>
-              <a:buSzPct val="100000"/>
-              <a:buChar char="•"/>
-            </a:pPr>
-            <a:r>
-              <a:rPr lang="en-US" sz="1300" dirty="0">
+              <a:buNone/>
+            </a:pPr>
+            <a:r>
+              <a:rPr lang="en-US" sz="1200" b="1" dirty="0">
+                <a:solidFill>
+                  <a:schemeClr val="tx2"/>
+                </a:solidFill>
+              </a:rPr>
+              <a:t>수술 종류로 정액 지급</a:t>
+            </a:r>
+            <a:endParaRPr lang="en-US" sz="1500" dirty="0"/>
+          </a:p>
+          <a:p>
+            <a:pPr indent="0" marL="0">
+              <a:buNone/>
+            </a:pPr>
+            <a:r>
+              <a:rPr lang="en-US" sz="1200" dirty="0">
                 <a:solidFill>
                   <a:schemeClr val="tx1"/>
                 </a:solidFill>
               </a:rPr>
-              <a:t>보건복지부·국민건강보험공단 비급여 보고제도 분석 (2025.9 진료분)</a:t>
-            </a:r>
-            <a:endParaRPr lang="en-US" sz="1300" dirty="0"/>
-          </a:p>
-          <a:p>
-            <a:pPr marL="342900" indent="-342900">
+              <a:t>약관 분류표의 1종~5종에 따라 정해진 금액을 수술 1회마다 드려요. 실손과 따로 받아요.</a:t>
+            </a:r>
+            <a:endParaRPr lang="en-US" sz="1500" dirty="0"/>
+          </a:p>
+        </p:txBody>
+      </p:sp>
+      <p:sp>
+        <p:nvSpPr>
+          <p:cNvPr id="11" name="kind-card-2"/>
+          <p:cNvSpPr/>
+          <p:nvPr/>
+        </p:nvSpPr>
+        <p:spPr>
+          <a:xfrm>
+            <a:off x="6035040" y="1143000"/>
+            <a:ext cx="2514600" cy="2743200"/>
+          </a:xfrm>
+          <a:prstGeom prst="roundRect">
+            <a:avLst>
+              <a:gd name="adj" fmla="val 7273"/>
+            </a:avLst>
+          </a:prstGeom>
+          <a:solidFill>
+            <a:schemeClr val="accent2"/>
+          </a:solidFill>
+          <a:ln/>
+        </p:spPr>
+      </p:sp>
+      <p:sp>
+        <p:nvSpPr>
+          <p:cNvPr id="12" name="kind-dot-2"/>
+          <p:cNvSpPr/>
+          <p:nvPr/>
+        </p:nvSpPr>
+        <p:spPr>
+          <a:xfrm>
+            <a:off x="6263640" y="1371600"/>
+            <a:ext cx="502920" cy="502920"/>
+          </a:xfrm>
+          <a:prstGeom prst="ellipse">
+            <a:avLst/>
+          </a:prstGeom>
+          <a:solidFill>
+            <a:schemeClr val="accent1"/>
+          </a:solidFill>
+          <a:ln/>
+        </p:spPr>
+      </p:sp>
+      <p:pic>
+        <p:nvPicPr>
+          <p:cNvPr id="13" name="kind-icon-2" descr="preencoded.png">    </p:cNvPr>
+          <p:cNvPicPr>
+            <a:picLocks noChangeAspect="1"/>
+          </p:cNvPicPr>
+          <p:nvPr/>
+        </p:nvPicPr>
+        <p:blipFill>
+          <a:blip r:embed="rId3"/>
+          <a:stretch>
+            <a:fillRect/>
+          </a:stretch>
+        </p:blipFill>
+        <p:spPr>
+          <a:xfrm>
+            <a:off x="6391656" y="1499616"/>
+            <a:ext cx="246888" cy="246888"/>
+          </a:xfrm>
+          <a:prstGeom prst="rect">
+            <a:avLst/>
+          </a:prstGeom>
+        </p:spPr>
+      </p:pic>
+      <p:sp>
+        <p:nvSpPr>
+          <p:cNvPr id="14" name="kind-text-2"/>
+          <p:cNvSpPr txBox="1"/>
+          <p:nvPr/>
+        </p:nvSpPr>
+        <p:spPr>
+          <a:xfrm>
+            <a:off x="6263640" y="2011680"/>
+            <a:ext cx="2103120" cy="1783080"/>
+          </a:xfrm>
+          <a:prstGeom prst="rect">
+            <a:avLst/>
+          </a:prstGeom>
+          <a:noFill/>
+          <a:ln/>
+        </p:spPr>
+        <p:txBody>
+          <a:bodyPr wrap="square" lIns="0" tIns="0" rIns="0" bIns="0" rtlCol="0" anchor="t"/>
+          <a:lstStyle/>
+          <a:p>
+            <a:pPr indent="0" marL="0">
+              <a:buNone/>
+            </a:pPr>
+            <a:r>
+              <a:rPr lang="en-US" sz="1500" b="1" dirty="0">
+                <a:solidFill>
+                  <a:schemeClr val="accent1"/>
+                </a:solidFill>
+              </a:rPr>
+              <a:t>131대(130대) 질병수술비</a:t>
+            </a:r>
+            <a:endParaRPr lang="en-US" sz="1500" dirty="0"/>
+          </a:p>
+          <a:p>
+            <a:pPr indent="0" marL="0">
               <a:spcAft>
                 <a:spcPts val="800"/>
               </a:spcAft>
-              <a:buSzPct val="100000"/>
-              <a:buChar char="•"/>
-            </a:pPr>
-            <a:r>
-              <a:rPr lang="en-US" sz="1300" dirty="0">
+              <a:buNone/>
+            </a:pPr>
+            <a:r>
+              <a:rPr lang="en-US" sz="1200" b="1" dirty="0">
+                <a:solidFill>
+                  <a:schemeClr val="tx2"/>
+                </a:solidFill>
+              </a:rPr>
+              <a:t>질병군으로 정액 지급</a:t>
+            </a:r>
+            <a:endParaRPr lang="en-US" sz="1500" dirty="0"/>
+          </a:p>
+          <a:p>
+            <a:pPr indent="0" marL="0">
+              <a:buNone/>
+            </a:pPr>
+            <a:r>
+              <a:rPr lang="en-US" sz="1200" dirty="0">
                 <a:solidFill>
                   <a:schemeClr val="tx1"/>
                 </a:solidFill>
               </a:rPr>
-              <a:t>심평원 비급여 공개 보도: 로봇수술(2016), 하이푸(2021.9 반영)</a:t>
-            </a:r>
-            <a:endParaRPr lang="en-US" sz="1300" dirty="0"/>
-          </a:p>
-          <a:p>
-            <a:pPr marL="342900" indent="-342900">
-              <a:spcAft>
-                <a:spcPts val="800"/>
-              </a:spcAft>
-              <a:buSzPct val="100000"/>
-              <a:buChar char="•"/>
-            </a:pPr>
-            <a:r>
-              <a:rPr lang="en-US" sz="1300" dirty="0">
-                <a:solidFill>
-                  <a:schemeClr val="tx1"/>
-                </a:solidFill>
-              </a:rPr>
-              <a:t>언론: 데일리팜, 메디칼업저버, 아시아경제, 법률신문, 의학신문</a:t>
-            </a:r>
-            <a:endParaRPr lang="en-US" sz="1300" dirty="0"/>
-          </a:p>
-          <a:p>
-            <a:pPr marL="342900" indent="-342900">
-              <a:spcAft>
-                <a:spcPts val="800"/>
-              </a:spcAft>
-              <a:buSzPct val="100000"/>
-              <a:buChar char="•"/>
-            </a:pPr>
-            <a:r>
-              <a:rPr lang="en-US" sz="1300" dirty="0">
-                <a:solidFill>
-                  <a:schemeClr val="tx1"/>
-                </a:solidFill>
-              </a:rPr>
-              <a:t>병원 게시가·가격비교: 내손안의닥터, 모두닥, 병원 비급여 고지</a:t>
-            </a:r>
-            <a:endParaRPr lang="en-US" sz="1300" dirty="0"/>
-          </a:p>
-        </p:txBody>
-      </p:sp>
-      <p:sp>
-        <p:nvSpPr>
-          <p:cNvPr id="4" name="caution-card"/>
-          <p:cNvSpPr/>
-          <p:nvPr/>
-        </p:nvSpPr>
-        <p:spPr>
-          <a:xfrm>
-            <a:off x="5760720" y="1143000"/>
-            <a:ext cx="2834640" cy="1920240"/>
-          </a:xfrm>
-          <a:prstGeom prst="roundRect">
-            <a:avLst>
-              <a:gd name="adj" fmla="val 9524"/>
-            </a:avLst>
-          </a:prstGeom>
-          <a:solidFill>
-            <a:schemeClr val="accent2"/>
-          </a:solidFill>
-          <a:ln/>
-        </p:spPr>
-      </p:sp>
-      <p:sp>
-        <p:nvSpPr>
-          <p:cNvPr id="5" name="caution-text"/>
-          <p:cNvSpPr txBox="1"/>
-          <p:nvPr/>
-        </p:nvSpPr>
-        <p:spPr>
-          <a:xfrm>
-            <a:off x="5989320" y="1325880"/>
-            <a:ext cx="2377440" cy="1645920"/>
-          </a:xfrm>
-          <a:prstGeom prst="rect">
-            <a:avLst/>
-          </a:prstGeom>
-          <a:noFill/>
-          <a:ln/>
-        </p:spPr>
-        <p:txBody>
-          <a:bodyPr wrap="square" lIns="0" tIns="0" rIns="0" bIns="0" rtlCol="0" anchor="t"/>
-          <a:lstStyle/>
-          <a:p>
-            <a:pPr indent="0" marL="0">
-              <a:buNone/>
-            </a:pPr>
-            <a:r>
-              <a:rPr lang="en-US" sz="1400" b="1" dirty="0">
+              <a:t>백내장·유방·여성생식기·척추 등 131개 질병군마다 수술 1회당 가입금액을 드려요.</a:t>
+            </a:r>
+            <a:endParaRPr lang="en-US" sz="1500" dirty="0"/>
+          </a:p>
+        </p:txBody>
+      </p:sp>
+      <p:sp>
+        <p:nvSpPr>
+          <p:cNvPr id="15" name="grade-example"/>
+          <p:cNvSpPr txBox="1"/>
+          <p:nvPr/>
+        </p:nvSpPr>
+        <p:spPr>
+          <a:xfrm>
+            <a:off x="548640" y="4069080"/>
+            <a:ext cx="8046720" cy="274320"/>
+          </a:xfrm>
+          <a:prstGeom prst="rect">
+            <a:avLst/>
+          </a:prstGeom>
+          <a:noFill/>
+          <a:ln/>
+        </p:spPr>
+        <p:txBody>
+          <a:bodyPr wrap="square" lIns="0" tIns="0" rIns="0" bIns="0" rtlCol="0" anchor="ctr"/>
+          <a:lstStyle/>
+          <a:p>
+            <a:pPr indent="0" marL="0">
+              <a:buNone/>
+            </a:pPr>
+            <a:r>
+              <a:rPr lang="en-US" sz="1100" b="1" dirty="0">
                 <a:solidFill>
                   <a:schemeClr val="accent1"/>
                 </a:solidFill>
               </a:rPr>
-              <a:t>꼭 알아 두세요</a:t>
-            </a:r>
-            <a:endParaRPr lang="en-US" sz="1400" dirty="0"/>
-          </a:p>
-          <a:p>
-            <a:pPr indent="0" marL="0">
-              <a:buNone/>
-            </a:pPr>
-            <a:r>
-              <a:rPr lang="en-US" sz="600" dirty="0">
-                <a:solidFill>
-                  <a:srgbClr val="000000"/>
-                </a:solidFill>
-              </a:rPr>
-              <a:t> </a:t>
-            </a:r>
-            <a:endParaRPr lang="en-US" sz="1400" dirty="0"/>
-          </a:p>
-          <a:p>
-            <a:pPr indent="0" marL="0">
-              <a:buNone/>
-            </a:pPr>
-            <a:r>
-              <a:rPr lang="en-US" sz="1200" dirty="0">
-                <a:solidFill>
-                  <a:schemeClr val="tx1"/>
-                </a:solidFill>
-              </a:rPr>
-              <a:t>공개 연도·집계 범위가 항목마다 달라요. 고객 안내 전 심평원 '비급여 진료비 정보'에서 최신 가격을 다시 확인하세요.</a:t>
-            </a:r>
-            <a:endParaRPr lang="en-US" sz="1400" dirty="0"/>
+              <a:t>1-5종 약관 예시: 1종 10만 · 2종 20만 · 3종 100만 · 4종 300만 · 5종 500만원 (가입금액마다 다름)</a:t>
+            </a:r>
+            <a:endParaRPr lang="en-US" sz="1100" dirty="0"/>
+          </a:p>
+        </p:txBody>
+      </p:sp>
+      <p:sp>
+        <p:nvSpPr>
+          <p:cNvPr id="16" name="source"/>
+          <p:cNvSpPr txBox="1"/>
+          <p:nvPr/>
+        </p:nvSpPr>
+        <p:spPr>
+          <a:xfrm>
+            <a:off x="548640" y="4443984"/>
+            <a:ext cx="8046720" cy="274320"/>
+          </a:xfrm>
+          <a:prstGeom prst="rect">
+            <a:avLst/>
+          </a:prstGeom>
+          <a:noFill/>
+          <a:ln/>
+        </p:spPr>
+        <p:txBody>
+          <a:bodyPr wrap="square" lIns="0" tIns="0" rIns="0" bIns="0" rtlCol="0" anchor="ctr"/>
+          <a:lstStyle/>
+          <a:p>
+            <a:pPr indent="0" marL="0">
+              <a:buNone/>
+            </a:pPr>
+            <a:r>
+              <a:rPr lang="en-US" sz="900" dirty="0">
+                <a:solidFill>
+                  <a:schemeClr val="accent3"/>
+                </a:solidFill>
+              </a:rPr>
+              <a:t>출처: 당사 약관 수술비Ⅱ(1-5종), 131대(케어프리)·130대(통합간편) 질병수술비. 131대·130대는 가입 1년 전 50%</a:t>
+            </a:r>
+            <a:endParaRPr lang="en-US" sz="900" dirty="0"/>
           </a:p>
         </p:txBody>
       </p:sp>
@@ -6993,6 +8013,3378 @@
             <a:fld id="{F7021451-1387-4CA6-816F-3879F97B5CBC}" type="slidenum">
               <a:rPr b="0" lang="en-US"/>
               <a:t>15</a:t>
+            </a:fld>
+            <a:endParaRPr lang="en-US"/>
+          </a:p>
+        </p:txBody>
+      </p:sp>
+    </p:spTree>
+  </p:cSld>
+  <p:clrMapOvr>
+    <a:masterClrMapping/>
+  </p:clrMapOvr>
+</p:sld>
+</file>
+
+<file path=ppt/slides/slide16.xml><?xml version="1.0" encoding="utf-8"?>
+<p:sld xmlns:a="http://schemas.openxmlformats.org/drawingml/2006/main" xmlns:r="http://schemas.openxmlformats.org/officeDocument/2006/relationships" xmlns:p="http://schemas.openxmlformats.org/presentationml/2006/main">
+  <p:cSld name="Slide 16">
+    <p:spTree>
+      <p:nvGrpSpPr>
+        <p:cNvPr id="1" name=""/>
+        <p:cNvGrpSpPr/>
+        <p:nvPr/>
+      </p:nvGrpSpPr>
+      <p:grpSpPr>
+        <a:xfrm>
+          <a:off x="0" y="0"/>
+          <a:ext cx="0" cy="0"/>
+          <a:chOff x="0" y="0"/>
+          <a:chExt cx="0" cy="0"/>
+        </a:xfrm>
+      </p:grpSpPr>
+      <p:sp>
+        <p:nvSpPr>
+          <p:cNvPr id="2" name="Text 1"/>
+          <p:cNvSpPr/>
+          <p:nvPr>
+            <p:ph idx="101" type="title" hasCustomPrompt="1"/>
+          </p:nvPr>
+        </p:nvSpPr>
+        <p:spPr>
+          <a:xfrm>
+            <a:off x="548640" y="384048"/>
+            <a:ext cx="8046720" cy="548640"/>
+          </a:xfrm>
+          <a:prstGeom prst="rect">
+            <a:avLst/>
+          </a:prstGeom>
+          <a:noFill/>
+          <a:ln/>
+        </p:spPr>
+        <p:txBody>
+          <a:bodyPr wrap="square" lIns="0" tIns="0" rIns="0" bIns="0" rtlCol="0" anchor="ctr"/>
+          <a:lstStyle/>
+          <a:p>
+            <a:pPr algn="l" indent="0" marL="0">
+              <a:buNone/>
+            </a:pPr>
+            <a:r>
+              <a:rPr lang="en-US" sz="2600" b="1" dirty="0">
+                <a:solidFill>
+                  <a:schemeClr val="tx1"/>
+                </a:solidFill>
+              </a:rPr>
+              <a:t>8가지 수술, 당사 수술비로 보면 (1/2)</a:t>
+            </a:r>
+            <a:endParaRPr lang="en-US" sz="2600" dirty="0"/>
+          </a:p>
+        </p:txBody>
+      </p:sp>
+      <p:sp>
+        <p:nvSpPr>
+          <p:cNvPr id="3" name="hdr-수술"/>
+          <p:cNvSpPr txBox="1"/>
+          <p:nvPr/>
+        </p:nvSpPr>
+        <p:spPr>
+          <a:xfrm>
+            <a:off x="731520" y="1024128"/>
+            <a:ext cx="2377440" cy="256032"/>
+          </a:xfrm>
+          <a:prstGeom prst="rect">
+            <a:avLst/>
+          </a:prstGeom>
+          <a:noFill/>
+          <a:ln/>
+        </p:spPr>
+        <p:txBody>
+          <a:bodyPr wrap="square" lIns="0" tIns="0" rIns="0" bIns="0" rtlCol="0" anchor="ctr"/>
+          <a:lstStyle/>
+          <a:p>
+            <a:pPr indent="0" marL="0">
+              <a:buNone/>
+            </a:pPr>
+            <a:r>
+              <a:rPr lang="en-US" sz="1100" b="1" dirty="0">
+                <a:solidFill>
+                  <a:schemeClr val="accent3"/>
+                </a:solidFill>
+              </a:rPr>
+              <a:t>수술</a:t>
+            </a:r>
+            <a:endParaRPr lang="en-US" sz="1100" dirty="0"/>
+          </a:p>
+        </p:txBody>
+      </p:sp>
+      <p:sp>
+        <p:nvSpPr>
+          <p:cNvPr id="4" name="hdr-1-5종 수술비"/>
+          <p:cNvSpPr txBox="1"/>
+          <p:nvPr/>
+        </p:nvSpPr>
+        <p:spPr>
+          <a:xfrm>
+            <a:off x="3063240" y="1024128"/>
+            <a:ext cx="2377440" cy="256032"/>
+          </a:xfrm>
+          <a:prstGeom prst="rect">
+            <a:avLst/>
+          </a:prstGeom>
+          <a:noFill/>
+          <a:ln/>
+        </p:spPr>
+        <p:txBody>
+          <a:bodyPr wrap="square" lIns="0" tIns="0" rIns="0" bIns="0" rtlCol="0" anchor="ctr"/>
+          <a:lstStyle/>
+          <a:p>
+            <a:pPr indent="0" marL="0">
+              <a:buNone/>
+            </a:pPr>
+            <a:r>
+              <a:rPr lang="en-US" sz="1100" b="1" dirty="0">
+                <a:solidFill>
+                  <a:schemeClr val="accent3"/>
+                </a:solidFill>
+              </a:rPr>
+              <a:t>1-5종 수술비</a:t>
+            </a:r>
+            <a:endParaRPr lang="en-US" sz="1100" dirty="0"/>
+          </a:p>
+        </p:txBody>
+      </p:sp>
+      <p:sp>
+        <p:nvSpPr>
+          <p:cNvPr id="5" name="hdr-131대(130대) 질병수술비"/>
+          <p:cNvSpPr txBox="1"/>
+          <p:nvPr/>
+        </p:nvSpPr>
+        <p:spPr>
+          <a:xfrm>
+            <a:off x="5623560" y="1024128"/>
+            <a:ext cx="2377440" cy="256032"/>
+          </a:xfrm>
+          <a:prstGeom prst="rect">
+            <a:avLst/>
+          </a:prstGeom>
+          <a:noFill/>
+          <a:ln/>
+        </p:spPr>
+        <p:txBody>
+          <a:bodyPr wrap="square" lIns="0" tIns="0" rIns="0" bIns="0" rtlCol="0" anchor="ctr"/>
+          <a:lstStyle/>
+          <a:p>
+            <a:pPr indent="0" marL="0">
+              <a:buNone/>
+            </a:pPr>
+            <a:r>
+              <a:rPr lang="en-US" sz="1100" b="1" dirty="0">
+                <a:solidFill>
+                  <a:schemeClr val="accent3"/>
+                </a:solidFill>
+              </a:rPr>
+              <a:t>131대(130대) 질병수술비</a:t>
+            </a:r>
+            <a:endParaRPr lang="en-US" sz="1100" dirty="0"/>
+          </a:p>
+        </p:txBody>
+      </p:sp>
+      <p:sp>
+        <p:nvSpPr>
+          <p:cNvPr id="6" name="cov-card-0"/>
+          <p:cNvSpPr/>
+          <p:nvPr/>
+        </p:nvSpPr>
+        <p:spPr>
+          <a:xfrm>
+            <a:off x="548640" y="1325880"/>
+            <a:ext cx="8046720" cy="676656"/>
+          </a:xfrm>
+          <a:prstGeom prst="roundRect">
+            <a:avLst>
+              <a:gd name="adj" fmla="val 20270"/>
+            </a:avLst>
+          </a:prstGeom>
+          <a:solidFill>
+            <a:schemeClr val="bg2"/>
+          </a:solidFill>
+          <a:ln/>
+        </p:spPr>
+      </p:sp>
+      <p:sp>
+        <p:nvSpPr>
+          <p:cNvPr id="7" name="cov-name-0"/>
+          <p:cNvSpPr txBox="1"/>
+          <p:nvPr/>
+        </p:nvSpPr>
+        <p:spPr>
+          <a:xfrm>
+            <a:off x="731520" y="1325880"/>
+            <a:ext cx="2194560" cy="676656"/>
+          </a:xfrm>
+          <a:prstGeom prst="rect">
+            <a:avLst/>
+          </a:prstGeom>
+          <a:noFill/>
+          <a:ln/>
+        </p:spPr>
+        <p:txBody>
+          <a:bodyPr wrap="square" lIns="0" tIns="0" rIns="0" bIns="0" rtlCol="0" anchor="ctr"/>
+          <a:lstStyle/>
+          <a:p>
+            <a:pPr indent="0" marL="0">
+              <a:buNone/>
+            </a:pPr>
+            <a:r>
+              <a:rPr lang="en-US" sz="1200" b="1" dirty="0">
+                <a:solidFill>
+                  <a:schemeClr val="tx1"/>
+                </a:solidFill>
+              </a:rPr>
+              <a:t>백내장 다초점</a:t>
+            </a:r>
+            <a:endParaRPr lang="en-US" sz="1200" dirty="0"/>
+          </a:p>
+        </p:txBody>
+      </p:sp>
+      <p:sp>
+        <p:nvSpPr>
+          <p:cNvPr id="8" name="cov-grade-0"/>
+          <p:cNvSpPr/>
+          <p:nvPr/>
+        </p:nvSpPr>
+        <p:spPr>
+          <a:xfrm>
+            <a:off x="3063240" y="1435608"/>
+            <a:ext cx="960120" cy="274320"/>
+          </a:xfrm>
+          <a:prstGeom prst="roundRect">
+            <a:avLst>
+              <a:gd name="adj" fmla="val 50000"/>
+            </a:avLst>
+          </a:prstGeom>
+          <a:solidFill>
+            <a:schemeClr val="bg1"/>
+          </a:solidFill>
+          <a:ln/>
+        </p:spPr>
+        <p:txBody>
+          <a:bodyPr wrap="square" lIns="0" tIns="0" rIns="0" bIns="0" rtlCol="0" anchor="ctr"/>
+          <a:lstStyle/>
+          <a:p>
+            <a:pPr algn="ctr" indent="0" marL="0">
+              <a:buNone/>
+            </a:pPr>
+            <a:r>
+              <a:rPr lang="en-US" sz="1100" b="1" dirty="0">
+                <a:solidFill>
+                  <a:schemeClr val="accent1"/>
+                </a:solidFill>
+              </a:rPr>
+              <a:t>1종</a:t>
+            </a:r>
+            <a:endParaRPr lang="en-US" sz="1100" dirty="0"/>
+          </a:p>
+        </p:txBody>
+      </p:sp>
+      <p:sp>
+        <p:nvSpPr>
+          <p:cNvPr id="9" name="cov-gnote-0"/>
+          <p:cNvSpPr txBox="1"/>
+          <p:nvPr/>
+        </p:nvSpPr>
+        <p:spPr>
+          <a:xfrm>
+            <a:off x="3063240" y="1737360"/>
+            <a:ext cx="2423160" cy="219456"/>
+          </a:xfrm>
+          <a:prstGeom prst="rect">
+            <a:avLst/>
+          </a:prstGeom>
+          <a:noFill/>
+          <a:ln/>
+        </p:spPr>
+        <p:txBody>
+          <a:bodyPr wrap="square" lIns="0" tIns="0" rIns="0" bIns="0" rtlCol="0" anchor="ctr"/>
+          <a:lstStyle/>
+          <a:p>
+            <a:pPr indent="0" marL="0">
+              <a:buNone/>
+            </a:pPr>
+            <a:r>
+              <a:rPr lang="en-US" sz="900" dirty="0">
+                <a:solidFill>
+                  <a:schemeClr val="tx2"/>
+                </a:solidFill>
+              </a:rPr>
+              <a:t>71항 백내장 수정체 관혈수술</a:t>
+            </a:r>
+            <a:endParaRPr lang="en-US" sz="900" dirty="0"/>
+          </a:p>
+        </p:txBody>
+      </p:sp>
+      <p:sp>
+        <p:nvSpPr>
+          <p:cNvPr id="10" name="cov-131-0"/>
+          <p:cNvSpPr txBox="1"/>
+          <p:nvPr/>
+        </p:nvSpPr>
+        <p:spPr>
+          <a:xfrm>
+            <a:off x="5623560" y="1399032"/>
+            <a:ext cx="2834640" cy="292608"/>
+          </a:xfrm>
+          <a:prstGeom prst="rect">
+            <a:avLst/>
+          </a:prstGeom>
+          <a:noFill/>
+          <a:ln/>
+        </p:spPr>
+        <p:txBody>
+          <a:bodyPr wrap="square" lIns="0" tIns="0" rIns="0" bIns="0" rtlCol="0" anchor="ctr"/>
+          <a:lstStyle/>
+          <a:p>
+            <a:pPr indent="0" marL="0">
+              <a:buNone/>
+            </a:pPr>
+            <a:r>
+              <a:rPr lang="en-US" sz="1100" b="1" dirty="0">
+                <a:solidFill>
+                  <a:schemeClr val="accent1"/>
+                </a:solidFill>
+              </a:rPr>
+              <a:t>[백내장]</a:t>
+            </a:r>
+            <a:endParaRPr lang="en-US" sz="1100" dirty="0"/>
+          </a:p>
+        </p:txBody>
+      </p:sp>
+      <p:sp>
+        <p:nvSpPr>
+          <p:cNvPr id="11" name="cov-note-0"/>
+          <p:cNvSpPr txBox="1"/>
+          <p:nvPr/>
+        </p:nvSpPr>
+        <p:spPr>
+          <a:xfrm>
+            <a:off x="5623560" y="1709928"/>
+            <a:ext cx="2834640" cy="237744"/>
+          </a:xfrm>
+          <a:prstGeom prst="rect">
+            <a:avLst/>
+          </a:prstGeom>
+          <a:noFill/>
+          <a:ln/>
+        </p:spPr>
+        <p:txBody>
+          <a:bodyPr wrap="square" lIns="0" tIns="0" rIns="0" bIns="0" rtlCol="0" anchor="ctr"/>
+          <a:lstStyle/>
+          <a:p>
+            <a:pPr indent="0" marL="0">
+              <a:buNone/>
+            </a:pPr>
+            <a:r>
+              <a:rPr lang="en-US" sz="900" dirty="0">
+                <a:solidFill>
+                  <a:schemeClr val="tx2"/>
+                </a:solidFill>
+              </a:rPr>
+              <a:t>양쪽 눈 다른 날 수술이면 각각</a:t>
+            </a:r>
+            <a:endParaRPr lang="en-US" sz="900" dirty="0"/>
+          </a:p>
+        </p:txBody>
+      </p:sp>
+      <p:sp>
+        <p:nvSpPr>
+          <p:cNvPr id="12" name="cov-card-1"/>
+          <p:cNvSpPr/>
+          <p:nvPr/>
+        </p:nvSpPr>
+        <p:spPr>
+          <a:xfrm>
+            <a:off x="548640" y="2093976"/>
+            <a:ext cx="8046720" cy="676656"/>
+          </a:xfrm>
+          <a:prstGeom prst="roundRect">
+            <a:avLst>
+              <a:gd name="adj" fmla="val 20270"/>
+            </a:avLst>
+          </a:prstGeom>
+          <a:solidFill>
+            <a:schemeClr val="bg2"/>
+          </a:solidFill>
+          <a:ln/>
+        </p:spPr>
+      </p:sp>
+      <p:sp>
+        <p:nvSpPr>
+          <p:cNvPr id="13" name="cov-name-1"/>
+          <p:cNvSpPr txBox="1"/>
+          <p:nvPr/>
+        </p:nvSpPr>
+        <p:spPr>
+          <a:xfrm>
+            <a:off x="731520" y="2093976"/>
+            <a:ext cx="2194560" cy="676656"/>
+          </a:xfrm>
+          <a:prstGeom prst="rect">
+            <a:avLst/>
+          </a:prstGeom>
+          <a:noFill/>
+          <a:ln/>
+        </p:spPr>
+        <p:txBody>
+          <a:bodyPr wrap="square" lIns="0" tIns="0" rIns="0" bIns="0" rtlCol="0" anchor="ctr"/>
+          <a:lstStyle/>
+          <a:p>
+            <a:pPr indent="0" marL="0">
+              <a:buNone/>
+            </a:pPr>
+            <a:r>
+              <a:rPr lang="en-US" sz="1200" b="1" dirty="0">
+                <a:solidFill>
+                  <a:schemeClr val="tx1"/>
+                </a:solidFill>
+              </a:rPr>
+              <a:t>다빈치 로봇 (전립선암·갑상선암)</a:t>
+            </a:r>
+            <a:endParaRPr lang="en-US" sz="1200" dirty="0"/>
+          </a:p>
+        </p:txBody>
+      </p:sp>
+      <p:sp>
+        <p:nvSpPr>
+          <p:cNvPr id="14" name="cov-grade-1"/>
+          <p:cNvSpPr/>
+          <p:nvPr/>
+        </p:nvSpPr>
+        <p:spPr>
+          <a:xfrm>
+            <a:off x="3063240" y="2203704"/>
+            <a:ext cx="960120" cy="274320"/>
+          </a:xfrm>
+          <a:prstGeom prst="roundRect">
+            <a:avLst>
+              <a:gd name="adj" fmla="val 50000"/>
+            </a:avLst>
+          </a:prstGeom>
+          <a:solidFill>
+            <a:schemeClr val="bg1"/>
+          </a:solidFill>
+          <a:ln/>
+        </p:spPr>
+        <p:txBody>
+          <a:bodyPr wrap="square" lIns="0" tIns="0" rIns="0" bIns="0" rtlCol="0" anchor="ctr"/>
+          <a:lstStyle/>
+          <a:p>
+            <a:pPr algn="ctr" indent="0" marL="0">
+              <a:buNone/>
+            </a:pPr>
+            <a:r>
+              <a:rPr lang="en-US" sz="1100" b="1" dirty="0">
+                <a:solidFill>
+                  <a:schemeClr val="accent1"/>
+                </a:solidFill>
+              </a:rPr>
+              <a:t>3~5종</a:t>
+            </a:r>
+            <a:endParaRPr lang="en-US" sz="1100" dirty="0"/>
+          </a:p>
+        </p:txBody>
+      </p:sp>
+      <p:sp>
+        <p:nvSpPr>
+          <p:cNvPr id="15" name="cov-gnote-1"/>
+          <p:cNvSpPr txBox="1"/>
+          <p:nvPr/>
+        </p:nvSpPr>
+        <p:spPr>
+          <a:xfrm>
+            <a:off x="3063240" y="2505456"/>
+            <a:ext cx="2423160" cy="219456"/>
+          </a:xfrm>
+          <a:prstGeom prst="rect">
+            <a:avLst/>
+          </a:prstGeom>
+          <a:noFill/>
+          <a:ln/>
+        </p:spPr>
+        <p:txBody>
+          <a:bodyPr wrap="square" lIns="0" tIns="0" rIns="0" bIns="0" rtlCol="0" anchor="ctr"/>
+          <a:lstStyle/>
+          <a:p>
+            <a:pPr indent="0" marL="0">
+              <a:buNone/>
+            </a:pPr>
+            <a:r>
+              <a:rPr lang="en-US" sz="900" dirty="0">
+                <a:solidFill>
+                  <a:schemeClr val="tx2"/>
+                </a:solidFill>
+              </a:rPr>
+              <a:t>악성신생물 수술(Ⅱ), 근치·방식에 따라</a:t>
+            </a:r>
+            <a:endParaRPr lang="en-US" sz="900" dirty="0"/>
+          </a:p>
+        </p:txBody>
+      </p:sp>
+      <p:sp>
+        <p:nvSpPr>
+          <p:cNvPr id="16" name="cov-131-1"/>
+          <p:cNvSpPr txBox="1"/>
+          <p:nvPr/>
+        </p:nvSpPr>
+        <p:spPr>
+          <a:xfrm>
+            <a:off x="5623560" y="2167128"/>
+            <a:ext cx="2834640" cy="292608"/>
+          </a:xfrm>
+          <a:prstGeom prst="rect">
+            <a:avLst/>
+          </a:prstGeom>
+          <a:noFill/>
+          <a:ln/>
+        </p:spPr>
+        <p:txBody>
+          <a:bodyPr wrap="square" lIns="0" tIns="0" rIns="0" bIns="0" rtlCol="0" anchor="ctr"/>
+          <a:lstStyle/>
+          <a:p>
+            <a:pPr indent="0" marL="0">
+              <a:buNone/>
+            </a:pPr>
+            <a:r>
+              <a:rPr lang="en-US" sz="1100" b="1" dirty="0">
+                <a:solidFill>
+                  <a:schemeClr val="accent3"/>
+                </a:solidFill>
+              </a:rPr>
+              <a:t>대상 아님</a:t>
+            </a:r>
+            <a:endParaRPr lang="en-US" sz="1100" dirty="0"/>
+          </a:p>
+        </p:txBody>
+      </p:sp>
+      <p:sp>
+        <p:nvSpPr>
+          <p:cNvPr id="17" name="cov-note-1"/>
+          <p:cNvSpPr txBox="1"/>
+          <p:nvPr/>
+        </p:nvSpPr>
+        <p:spPr>
+          <a:xfrm>
+            <a:off x="5623560" y="2478024"/>
+            <a:ext cx="2834640" cy="237744"/>
+          </a:xfrm>
+          <a:prstGeom prst="rect">
+            <a:avLst/>
+          </a:prstGeom>
+          <a:noFill/>
+          <a:ln/>
+        </p:spPr>
+        <p:txBody>
+          <a:bodyPr wrap="square" lIns="0" tIns="0" rIns="0" bIns="0" rtlCol="0" anchor="ctr"/>
+          <a:lstStyle/>
+          <a:p>
+            <a:pPr indent="0" marL="0">
+              <a:buNone/>
+            </a:pPr>
+            <a:r>
+              <a:rPr lang="en-US" sz="900" dirty="0">
+                <a:solidFill>
+                  <a:schemeClr val="tx2"/>
+                </a:solidFill>
+              </a:rPr>
+              <a:t>암은 131대 밖 → 다빈치로봇 암수술비</a:t>
+            </a:r>
+            <a:endParaRPr lang="en-US" sz="900" dirty="0"/>
+          </a:p>
+        </p:txBody>
+      </p:sp>
+      <p:sp>
+        <p:nvSpPr>
+          <p:cNvPr id="18" name="cov-card-2"/>
+          <p:cNvSpPr/>
+          <p:nvPr/>
+        </p:nvSpPr>
+        <p:spPr>
+          <a:xfrm>
+            <a:off x="548640" y="2862072"/>
+            <a:ext cx="8046720" cy="676656"/>
+          </a:xfrm>
+          <a:prstGeom prst="roundRect">
+            <a:avLst>
+              <a:gd name="adj" fmla="val 20270"/>
+            </a:avLst>
+          </a:prstGeom>
+          <a:solidFill>
+            <a:schemeClr val="bg2"/>
+          </a:solidFill>
+          <a:ln/>
+        </p:spPr>
+      </p:sp>
+      <p:sp>
+        <p:nvSpPr>
+          <p:cNvPr id="19" name="cov-name-2"/>
+          <p:cNvSpPr txBox="1"/>
+          <p:nvPr/>
+        </p:nvSpPr>
+        <p:spPr>
+          <a:xfrm>
+            <a:off x="731520" y="2862072"/>
+            <a:ext cx="2194560" cy="676656"/>
+          </a:xfrm>
+          <a:prstGeom prst="rect">
+            <a:avLst/>
+          </a:prstGeom>
+          <a:noFill/>
+          <a:ln/>
+        </p:spPr>
+        <p:txBody>
+          <a:bodyPr wrap="square" lIns="0" tIns="0" rIns="0" bIns="0" rtlCol="0" anchor="ctr"/>
+          <a:lstStyle/>
+          <a:p>
+            <a:pPr indent="0" marL="0">
+              <a:buNone/>
+            </a:pPr>
+            <a:r>
+              <a:rPr lang="en-US" sz="1200" b="1" dirty="0">
+                <a:solidFill>
+                  <a:schemeClr val="tx1"/>
+                </a:solidFill>
+              </a:rPr>
+              <a:t>하이푸 (자궁근종)</a:t>
+            </a:r>
+            <a:endParaRPr lang="en-US" sz="1200" dirty="0"/>
+          </a:p>
+        </p:txBody>
+      </p:sp>
+      <p:sp>
+        <p:nvSpPr>
+          <p:cNvPr id="20" name="cov-grade-2"/>
+          <p:cNvSpPr/>
+          <p:nvPr/>
+        </p:nvSpPr>
+        <p:spPr>
+          <a:xfrm>
+            <a:off x="3063240" y="2971800"/>
+            <a:ext cx="960120" cy="274320"/>
+          </a:xfrm>
+          <a:prstGeom prst="roundRect">
+            <a:avLst>
+              <a:gd name="adj" fmla="val 50000"/>
+            </a:avLst>
+          </a:prstGeom>
+          <a:solidFill>
+            <a:srgbClr val="FFF3E0"/>
+          </a:solidFill>
+          <a:ln/>
+        </p:spPr>
+        <p:txBody>
+          <a:bodyPr wrap="square" lIns="0" tIns="0" rIns="0" bIns="0" rtlCol="0" anchor="ctr"/>
+          <a:lstStyle/>
+          <a:p>
+            <a:pPr algn="ctr" indent="0" marL="0">
+              <a:buNone/>
+            </a:pPr>
+            <a:r>
+              <a:rPr lang="en-US" sz="1100" b="1" dirty="0">
+                <a:solidFill>
+                  <a:srgbClr val="D9480F"/>
+                </a:solidFill>
+              </a:rPr>
+              <a:t>확인 필요</a:t>
+            </a:r>
+            <a:endParaRPr lang="en-US" sz="1100" dirty="0"/>
+          </a:p>
+        </p:txBody>
+      </p:sp>
+      <p:sp>
+        <p:nvSpPr>
+          <p:cNvPr id="21" name="cov-gnote-2"/>
+          <p:cNvSpPr txBox="1"/>
+          <p:nvPr/>
+        </p:nvSpPr>
+        <p:spPr>
+          <a:xfrm>
+            <a:off x="3063240" y="3273552"/>
+            <a:ext cx="2423160" cy="219456"/>
+          </a:xfrm>
+          <a:prstGeom prst="rect">
+            <a:avLst/>
+          </a:prstGeom>
+          <a:noFill/>
+          <a:ln/>
+        </p:spPr>
+        <p:txBody>
+          <a:bodyPr wrap="square" lIns="0" tIns="0" rIns="0" bIns="0" rtlCol="0" anchor="ctr"/>
+          <a:lstStyle/>
+          <a:p>
+            <a:pPr indent="0" marL="0">
+              <a:buNone/>
+            </a:pPr>
+            <a:r>
+              <a:rPr lang="en-US" sz="900" dirty="0">
+                <a:solidFill>
+                  <a:schemeClr val="tx2"/>
+                </a:solidFill>
+              </a:rPr>
+              <a:t>분류표에 이름 없음, 보상 확인</a:t>
+            </a:r>
+            <a:endParaRPr lang="en-US" sz="900" dirty="0"/>
+          </a:p>
+        </p:txBody>
+      </p:sp>
+      <p:sp>
+        <p:nvSpPr>
+          <p:cNvPr id="22" name="cov-131-2"/>
+          <p:cNvSpPr txBox="1"/>
+          <p:nvPr/>
+        </p:nvSpPr>
+        <p:spPr>
+          <a:xfrm>
+            <a:off x="5623560" y="2935224"/>
+            <a:ext cx="2834640" cy="292608"/>
+          </a:xfrm>
+          <a:prstGeom prst="rect">
+            <a:avLst/>
+          </a:prstGeom>
+          <a:noFill/>
+          <a:ln/>
+        </p:spPr>
+        <p:txBody>
+          <a:bodyPr wrap="square" lIns="0" tIns="0" rIns="0" bIns="0" rtlCol="0" anchor="ctr"/>
+          <a:lstStyle/>
+          <a:p>
+            <a:pPr indent="0" marL="0">
+              <a:buNone/>
+            </a:pPr>
+            <a:r>
+              <a:rPr lang="en-US" sz="1100" b="1" dirty="0">
+                <a:solidFill>
+                  <a:schemeClr val="accent1"/>
+                </a:solidFill>
+              </a:rPr>
+              <a:t>[다빈도62대] 여성생식기 양성종양</a:t>
+            </a:r>
+            <a:endParaRPr lang="en-US" sz="1100" dirty="0"/>
+          </a:p>
+        </p:txBody>
+      </p:sp>
+      <p:sp>
+        <p:nvSpPr>
+          <p:cNvPr id="23" name="cov-note-2"/>
+          <p:cNvSpPr txBox="1"/>
+          <p:nvPr/>
+        </p:nvSpPr>
+        <p:spPr>
+          <a:xfrm>
+            <a:off x="5623560" y="3246120"/>
+            <a:ext cx="2834640" cy="237744"/>
+          </a:xfrm>
+          <a:prstGeom prst="rect">
+            <a:avLst/>
+          </a:prstGeom>
+          <a:noFill/>
+          <a:ln/>
+        </p:spPr>
+        <p:txBody>
+          <a:bodyPr wrap="square" lIns="0" tIns="0" rIns="0" bIns="0" rtlCol="0" anchor="ctr"/>
+          <a:lstStyle/>
+          <a:p>
+            <a:pPr indent="0" marL="0">
+              <a:buNone/>
+            </a:pPr>
+            <a:r>
+              <a:rPr lang="en-US" sz="900" dirty="0">
+                <a:solidFill>
+                  <a:schemeClr val="tx2"/>
+                </a:solidFill>
+              </a:rPr>
+              <a:t>수술 인정 시. 선근증은 [생식기질환]</a:t>
+            </a:r>
+            <a:endParaRPr lang="en-US" sz="900" dirty="0"/>
+          </a:p>
+        </p:txBody>
+      </p:sp>
+      <p:sp>
+        <p:nvSpPr>
+          <p:cNvPr id="24" name="cov-card-3"/>
+          <p:cNvSpPr/>
+          <p:nvPr/>
+        </p:nvSpPr>
+        <p:spPr>
+          <a:xfrm>
+            <a:off x="548640" y="3630168"/>
+            <a:ext cx="8046720" cy="676656"/>
+          </a:xfrm>
+          <a:prstGeom prst="roundRect">
+            <a:avLst>
+              <a:gd name="adj" fmla="val 20270"/>
+            </a:avLst>
+          </a:prstGeom>
+          <a:solidFill>
+            <a:schemeClr val="bg2"/>
+          </a:solidFill>
+          <a:ln/>
+        </p:spPr>
+      </p:sp>
+      <p:sp>
+        <p:nvSpPr>
+          <p:cNvPr id="25" name="cov-name-3"/>
+          <p:cNvSpPr txBox="1"/>
+          <p:nvPr/>
+        </p:nvSpPr>
+        <p:spPr>
+          <a:xfrm>
+            <a:off x="731520" y="3630168"/>
+            <a:ext cx="2194560" cy="676656"/>
+          </a:xfrm>
+          <a:prstGeom prst="rect">
+            <a:avLst/>
+          </a:prstGeom>
+          <a:noFill/>
+          <a:ln/>
+        </p:spPr>
+        <p:txBody>
+          <a:bodyPr wrap="square" lIns="0" tIns="0" rIns="0" bIns="0" rtlCol="0" anchor="ctr"/>
+          <a:lstStyle/>
+          <a:p>
+            <a:pPr indent="0" marL="0">
+              <a:buNone/>
+            </a:pPr>
+            <a:r>
+              <a:rPr lang="en-US" sz="1200" b="1" dirty="0">
+                <a:solidFill>
+                  <a:schemeClr val="tx1"/>
+                </a:solidFill>
+              </a:rPr>
+              <a:t>맘모톰 (유방 양성종양)</a:t>
+            </a:r>
+            <a:endParaRPr lang="en-US" sz="1200" dirty="0"/>
+          </a:p>
+        </p:txBody>
+      </p:sp>
+      <p:sp>
+        <p:nvSpPr>
+          <p:cNvPr id="26" name="cov-grade-3"/>
+          <p:cNvSpPr/>
+          <p:nvPr/>
+        </p:nvSpPr>
+        <p:spPr>
+          <a:xfrm>
+            <a:off x="3063240" y="3739896"/>
+            <a:ext cx="960120" cy="274320"/>
+          </a:xfrm>
+          <a:prstGeom prst="roundRect">
+            <a:avLst>
+              <a:gd name="adj" fmla="val 50000"/>
+            </a:avLst>
+          </a:prstGeom>
+          <a:solidFill>
+            <a:schemeClr val="bg1"/>
+          </a:solidFill>
+          <a:ln/>
+        </p:spPr>
+        <p:txBody>
+          <a:bodyPr wrap="square" lIns="0" tIns="0" rIns="0" bIns="0" rtlCol="0" anchor="ctr"/>
+          <a:lstStyle/>
+          <a:p>
+            <a:pPr algn="ctr" indent="0" marL="0">
+              <a:buNone/>
+            </a:pPr>
+            <a:r>
+              <a:rPr lang="en-US" sz="1100" b="1" dirty="0">
+                <a:solidFill>
+                  <a:schemeClr val="accent1"/>
+                </a:solidFill>
+              </a:rPr>
+              <a:t>1종</a:t>
+            </a:r>
+            <a:endParaRPr lang="en-US" sz="1100" dirty="0"/>
+          </a:p>
+        </p:txBody>
+      </p:sp>
+      <p:sp>
+        <p:nvSpPr>
+          <p:cNvPr id="27" name="cov-gnote-3"/>
+          <p:cNvSpPr txBox="1"/>
+          <p:nvPr/>
+        </p:nvSpPr>
+        <p:spPr>
+          <a:xfrm>
+            <a:off x="3063240" y="4041648"/>
+            <a:ext cx="2423160" cy="219456"/>
+          </a:xfrm>
+          <a:prstGeom prst="rect">
+            <a:avLst/>
+          </a:prstGeom>
+          <a:noFill/>
+          <a:ln/>
+        </p:spPr>
+        <p:txBody>
+          <a:bodyPr wrap="square" lIns="0" tIns="0" rIns="0" bIns="0" rtlCol="0" anchor="ctr"/>
+          <a:lstStyle/>
+          <a:p>
+            <a:pPr indent="0" marL="0">
+              <a:buNone/>
+            </a:pPr>
+            <a:r>
+              <a:rPr lang="en-US" sz="900" dirty="0">
+                <a:solidFill>
+                  <a:schemeClr val="tx2"/>
+                </a:solidFill>
+              </a:rPr>
+              <a:t>4항에 '맘모톰' 직접 명시</a:t>
+            </a:r>
+            <a:endParaRPr lang="en-US" sz="900" dirty="0"/>
+          </a:p>
+        </p:txBody>
+      </p:sp>
+      <p:sp>
+        <p:nvSpPr>
+          <p:cNvPr id="28" name="cov-131-3"/>
+          <p:cNvSpPr txBox="1"/>
+          <p:nvPr/>
+        </p:nvSpPr>
+        <p:spPr>
+          <a:xfrm>
+            <a:off x="5623560" y="3703320"/>
+            <a:ext cx="2834640" cy="292608"/>
+          </a:xfrm>
+          <a:prstGeom prst="rect">
+            <a:avLst/>
+          </a:prstGeom>
+          <a:noFill/>
+          <a:ln/>
+        </p:spPr>
+        <p:txBody>
+          <a:bodyPr wrap="square" lIns="0" tIns="0" rIns="0" bIns="0" rtlCol="0" anchor="ctr"/>
+          <a:lstStyle/>
+          <a:p>
+            <a:pPr indent="0" marL="0">
+              <a:buNone/>
+            </a:pPr>
+            <a:r>
+              <a:rPr lang="en-US" sz="1100" b="1" dirty="0">
+                <a:solidFill>
+                  <a:schemeClr val="accent1"/>
+                </a:solidFill>
+              </a:rPr>
+              <a:t>[특정다빈도29대] 유방 양성신생물</a:t>
+            </a:r>
+            <a:endParaRPr lang="en-US" sz="1100" dirty="0"/>
+          </a:p>
+        </p:txBody>
+      </p:sp>
+      <p:sp>
+        <p:nvSpPr>
+          <p:cNvPr id="29" name="cov-note-3"/>
+          <p:cNvSpPr txBox="1"/>
+          <p:nvPr/>
+        </p:nvSpPr>
+        <p:spPr>
+          <a:xfrm>
+            <a:off x="5623560" y="4014216"/>
+            <a:ext cx="2834640" cy="237744"/>
+          </a:xfrm>
+          <a:prstGeom prst="rect">
+            <a:avLst/>
+          </a:prstGeom>
+          <a:noFill/>
+          <a:ln/>
+        </p:spPr>
+        <p:txBody>
+          <a:bodyPr wrap="square" lIns="0" tIns="0" rIns="0" bIns="0" rtlCol="0" anchor="ctr"/>
+          <a:lstStyle/>
+          <a:p>
+            <a:pPr indent="0" marL="0">
+              <a:buNone/>
+            </a:pPr>
+            <a:r>
+              <a:rPr lang="en-US" sz="900" dirty="0">
+                <a:solidFill>
+                  <a:schemeClr val="tx2"/>
+                </a:solidFill>
+              </a:rPr>
+              <a:t>60일 안 2회 이상은 1회</a:t>
+            </a:r>
+            <a:endParaRPr lang="en-US" sz="900" dirty="0"/>
+          </a:p>
+        </p:txBody>
+      </p:sp>
+      <p:sp>
+        <p:nvSpPr>
+          <p:cNvPr id="30" name="source"/>
+          <p:cNvSpPr txBox="1"/>
+          <p:nvPr/>
+        </p:nvSpPr>
+        <p:spPr>
+          <a:xfrm>
+            <a:off x="548640" y="4443984"/>
+            <a:ext cx="8046720" cy="274320"/>
+          </a:xfrm>
+          <a:prstGeom prst="rect">
+            <a:avLst/>
+          </a:prstGeom>
+          <a:noFill/>
+          <a:ln/>
+        </p:spPr>
+        <p:txBody>
+          <a:bodyPr wrap="square" lIns="0" tIns="0" rIns="0" bIns="0" rtlCol="0" anchor="ctr"/>
+          <a:lstStyle/>
+          <a:p>
+            <a:pPr indent="0" marL="0">
+              <a:buNone/>
+            </a:pPr>
+            <a:r>
+              <a:rPr lang="en-US" sz="900" dirty="0">
+                <a:solidFill>
+                  <a:schemeClr val="accent3"/>
+                </a:solidFill>
+              </a:rPr>
+              <a:t>근거: 당사 약관 1-5종 수술분류표Ⅱ·131대/130대 질병군. '확인 필요' = 분류표에 이름이 없어 보상 부서 확인 필요</a:t>
+            </a:r>
+            <a:endParaRPr lang="en-US" sz="900" dirty="0"/>
+          </a:p>
+        </p:txBody>
+      </p:sp>
+      <p:sp>
+        <p:nvSpPr>
+          <p:cNvPr id="25" name="Slide Number Placeholder 0"/>
+          <p:cNvSpPr>
+            <a:spLocks noGrp="1"/>
+          </p:cNvSpPr>
+          <p:nvPr>
+            <p:ph type="sldNum" sz="quarter" idx="4294967295"/>
+          </p:nvPr>
+        </p:nvSpPr>
+        <p:spPr>
+          <a:xfrm>
+            <a:off x="8229600" y="4773168"/>
+            <a:ext cx="365760" cy="228600"/>
+          </a:xfrm>
+          <a:prstGeom prst="rect">
+            <a:avLst/>
+          </a:prstGeom>
+          <a:extLst>
+            <a:ext uri="{C572A759-6A51-4108-AA02-DFA0A04FC94B}">
+              <ma14:wrappingTextBoxFlag xmlns:ma14="http://schemas.microsoft.com/office/mac/drawingml/2011/main" val="0"/>
+            </a:ext>
+          </a:extLst>
+        </p:spPr>
+        <p:txBody>
+          <a:bodyPr/>
+          <a:lstStyle>
+            <a:lvl1pPr>
+              <a:defRPr sz="900">
+                <a:solidFill>
+                  <a:schemeClr val="accent3"/>
+                </a:solidFill>
+              </a:defRPr>
+            </a:lvl1pPr>
+          </a:lstStyle>
+          <a:p>
+            <a:pPr algn="r"/>
+            <a:fld id="{F7021451-1387-4CA6-816F-3879F97B5CBC}" type="slidenum">
+              <a:rPr b="0" lang="en-US"/>
+              <a:t>16</a:t>
+            </a:fld>
+            <a:endParaRPr lang="en-US"/>
+          </a:p>
+        </p:txBody>
+      </p:sp>
+    </p:spTree>
+  </p:cSld>
+  <p:clrMapOvr>
+    <a:masterClrMapping/>
+  </p:clrMapOvr>
+</p:sld>
+</file>
+
+<file path=ppt/slides/slide17.xml><?xml version="1.0" encoding="utf-8"?>
+<p:sld xmlns:a="http://schemas.openxmlformats.org/drawingml/2006/main" xmlns:r="http://schemas.openxmlformats.org/officeDocument/2006/relationships" xmlns:p="http://schemas.openxmlformats.org/presentationml/2006/main">
+  <p:cSld name="Slide 17">
+    <p:spTree>
+      <p:nvGrpSpPr>
+        <p:cNvPr id="1" name=""/>
+        <p:cNvGrpSpPr/>
+        <p:nvPr/>
+      </p:nvGrpSpPr>
+      <p:grpSpPr>
+        <a:xfrm>
+          <a:off x="0" y="0"/>
+          <a:ext cx="0" cy="0"/>
+          <a:chOff x="0" y="0"/>
+          <a:chExt cx="0" cy="0"/>
+        </a:xfrm>
+      </p:grpSpPr>
+      <p:sp>
+        <p:nvSpPr>
+          <p:cNvPr id="2" name="Text 1"/>
+          <p:cNvSpPr/>
+          <p:nvPr>
+            <p:ph idx="101" type="title" hasCustomPrompt="1"/>
+          </p:nvPr>
+        </p:nvSpPr>
+        <p:spPr>
+          <a:xfrm>
+            <a:off x="548640" y="384048"/>
+            <a:ext cx="8046720" cy="548640"/>
+          </a:xfrm>
+          <a:prstGeom prst="rect">
+            <a:avLst/>
+          </a:prstGeom>
+          <a:noFill/>
+          <a:ln/>
+        </p:spPr>
+        <p:txBody>
+          <a:bodyPr wrap="square" lIns="0" tIns="0" rIns="0" bIns="0" rtlCol="0" anchor="ctr"/>
+          <a:lstStyle/>
+          <a:p>
+            <a:pPr algn="l" indent="0" marL="0">
+              <a:buNone/>
+            </a:pPr>
+            <a:r>
+              <a:rPr lang="en-US" sz="2600" b="1" dirty="0">
+                <a:solidFill>
+                  <a:schemeClr val="tx1"/>
+                </a:solidFill>
+              </a:rPr>
+              <a:t>8가지 수술, 당사 수술비로 보면 (2/2)</a:t>
+            </a:r>
+            <a:endParaRPr lang="en-US" sz="2600" dirty="0"/>
+          </a:p>
+        </p:txBody>
+      </p:sp>
+      <p:sp>
+        <p:nvSpPr>
+          <p:cNvPr id="3" name="hdr-수술"/>
+          <p:cNvSpPr txBox="1"/>
+          <p:nvPr/>
+        </p:nvSpPr>
+        <p:spPr>
+          <a:xfrm>
+            <a:off x="731520" y="1024128"/>
+            <a:ext cx="2377440" cy="256032"/>
+          </a:xfrm>
+          <a:prstGeom prst="rect">
+            <a:avLst/>
+          </a:prstGeom>
+          <a:noFill/>
+          <a:ln/>
+        </p:spPr>
+        <p:txBody>
+          <a:bodyPr wrap="square" lIns="0" tIns="0" rIns="0" bIns="0" rtlCol="0" anchor="ctr"/>
+          <a:lstStyle/>
+          <a:p>
+            <a:pPr indent="0" marL="0">
+              <a:buNone/>
+            </a:pPr>
+            <a:r>
+              <a:rPr lang="en-US" sz="1100" b="1" dirty="0">
+                <a:solidFill>
+                  <a:schemeClr val="accent3"/>
+                </a:solidFill>
+              </a:rPr>
+              <a:t>수술</a:t>
+            </a:r>
+            <a:endParaRPr lang="en-US" sz="1100" dirty="0"/>
+          </a:p>
+        </p:txBody>
+      </p:sp>
+      <p:sp>
+        <p:nvSpPr>
+          <p:cNvPr id="4" name="hdr-1-5종 수술비"/>
+          <p:cNvSpPr txBox="1"/>
+          <p:nvPr/>
+        </p:nvSpPr>
+        <p:spPr>
+          <a:xfrm>
+            <a:off x="3063240" y="1024128"/>
+            <a:ext cx="2377440" cy="256032"/>
+          </a:xfrm>
+          <a:prstGeom prst="rect">
+            <a:avLst/>
+          </a:prstGeom>
+          <a:noFill/>
+          <a:ln/>
+        </p:spPr>
+        <p:txBody>
+          <a:bodyPr wrap="square" lIns="0" tIns="0" rIns="0" bIns="0" rtlCol="0" anchor="ctr"/>
+          <a:lstStyle/>
+          <a:p>
+            <a:pPr indent="0" marL="0">
+              <a:buNone/>
+            </a:pPr>
+            <a:r>
+              <a:rPr lang="en-US" sz="1100" b="1" dirty="0">
+                <a:solidFill>
+                  <a:schemeClr val="accent3"/>
+                </a:solidFill>
+              </a:rPr>
+              <a:t>1-5종 수술비</a:t>
+            </a:r>
+            <a:endParaRPr lang="en-US" sz="1100" dirty="0"/>
+          </a:p>
+        </p:txBody>
+      </p:sp>
+      <p:sp>
+        <p:nvSpPr>
+          <p:cNvPr id="5" name="hdr-131대(130대) 질병수술비"/>
+          <p:cNvSpPr txBox="1"/>
+          <p:nvPr/>
+        </p:nvSpPr>
+        <p:spPr>
+          <a:xfrm>
+            <a:off x="5623560" y="1024128"/>
+            <a:ext cx="2377440" cy="256032"/>
+          </a:xfrm>
+          <a:prstGeom prst="rect">
+            <a:avLst/>
+          </a:prstGeom>
+          <a:noFill/>
+          <a:ln/>
+        </p:spPr>
+        <p:txBody>
+          <a:bodyPr wrap="square" lIns="0" tIns="0" rIns="0" bIns="0" rtlCol="0" anchor="ctr"/>
+          <a:lstStyle/>
+          <a:p>
+            <a:pPr indent="0" marL="0">
+              <a:buNone/>
+            </a:pPr>
+            <a:r>
+              <a:rPr lang="en-US" sz="1100" b="1" dirty="0">
+                <a:solidFill>
+                  <a:schemeClr val="accent3"/>
+                </a:solidFill>
+              </a:rPr>
+              <a:t>131대(130대) 질병수술비</a:t>
+            </a:r>
+            <a:endParaRPr lang="en-US" sz="1100" dirty="0"/>
+          </a:p>
+        </p:txBody>
+      </p:sp>
+      <p:sp>
+        <p:nvSpPr>
+          <p:cNvPr id="6" name="cov-card-0"/>
+          <p:cNvSpPr/>
+          <p:nvPr/>
+        </p:nvSpPr>
+        <p:spPr>
+          <a:xfrm>
+            <a:off x="548640" y="1325880"/>
+            <a:ext cx="8046720" cy="676656"/>
+          </a:xfrm>
+          <a:prstGeom prst="roundRect">
+            <a:avLst>
+              <a:gd name="adj" fmla="val 20270"/>
+            </a:avLst>
+          </a:prstGeom>
+          <a:solidFill>
+            <a:schemeClr val="bg2"/>
+          </a:solidFill>
+          <a:ln/>
+        </p:spPr>
+      </p:sp>
+      <p:sp>
+        <p:nvSpPr>
+          <p:cNvPr id="7" name="cov-name-0"/>
+          <p:cNvSpPr txBox="1"/>
+          <p:nvPr/>
+        </p:nvSpPr>
+        <p:spPr>
+          <a:xfrm>
+            <a:off x="731520" y="1325880"/>
+            <a:ext cx="2194560" cy="676656"/>
+          </a:xfrm>
+          <a:prstGeom prst="rect">
+            <a:avLst/>
+          </a:prstGeom>
+          <a:noFill/>
+          <a:ln/>
+        </p:spPr>
+        <p:txBody>
+          <a:bodyPr wrap="square" lIns="0" tIns="0" rIns="0" bIns="0" rtlCol="0" anchor="ctr"/>
+          <a:lstStyle/>
+          <a:p>
+            <a:pPr indent="0" marL="0">
+              <a:buNone/>
+            </a:pPr>
+            <a:r>
+              <a:rPr lang="en-US" sz="1200" b="1" dirty="0">
+                <a:solidFill>
+                  <a:schemeClr val="tx1"/>
+                </a:solidFill>
+              </a:rPr>
+              <a:t>하지정맥류 (고주파·레이저)</a:t>
+            </a:r>
+            <a:endParaRPr lang="en-US" sz="1200" dirty="0"/>
+          </a:p>
+        </p:txBody>
+      </p:sp>
+      <p:sp>
+        <p:nvSpPr>
+          <p:cNvPr id="8" name="cov-grade-0"/>
+          <p:cNvSpPr/>
+          <p:nvPr/>
+        </p:nvSpPr>
+        <p:spPr>
+          <a:xfrm>
+            <a:off x="3063240" y="1435608"/>
+            <a:ext cx="960120" cy="274320"/>
+          </a:xfrm>
+          <a:prstGeom prst="roundRect">
+            <a:avLst>
+              <a:gd name="adj" fmla="val 50000"/>
+            </a:avLst>
+          </a:prstGeom>
+          <a:solidFill>
+            <a:schemeClr val="bg1"/>
+          </a:solidFill>
+          <a:ln/>
+        </p:spPr>
+        <p:txBody>
+          <a:bodyPr wrap="square" lIns="0" tIns="0" rIns="0" bIns="0" rtlCol="0" anchor="ctr"/>
+          <a:lstStyle/>
+          <a:p>
+            <a:pPr algn="ctr" indent="0" marL="0">
+              <a:buNone/>
+            </a:pPr>
+            <a:r>
+              <a:rPr lang="en-US" sz="1100" b="1" dirty="0">
+                <a:solidFill>
+                  <a:schemeClr val="accent1"/>
+                </a:solidFill>
+              </a:rPr>
+              <a:t>1종 유력</a:t>
+            </a:r>
+            <a:endParaRPr lang="en-US" sz="1100" dirty="0"/>
+          </a:p>
+        </p:txBody>
+      </p:sp>
+      <p:sp>
+        <p:nvSpPr>
+          <p:cNvPr id="9" name="cov-gnote-0"/>
+          <p:cNvSpPr txBox="1"/>
+          <p:nvPr/>
+        </p:nvSpPr>
+        <p:spPr>
+          <a:xfrm>
+            <a:off x="3063240" y="1737360"/>
+            <a:ext cx="2423160" cy="219456"/>
+          </a:xfrm>
+          <a:prstGeom prst="rect">
+            <a:avLst/>
+          </a:prstGeom>
+          <a:noFill/>
+          <a:ln/>
+        </p:spPr>
+        <p:txBody>
+          <a:bodyPr wrap="square" lIns="0" tIns="0" rIns="0" bIns="0" rtlCol="0" anchor="ctr"/>
+          <a:lstStyle/>
+          <a:p>
+            <a:pPr indent="0" marL="0">
+              <a:buNone/>
+            </a:pPr>
+            <a:r>
+              <a:rPr lang="en-US" sz="900" dirty="0">
+                <a:solidFill>
+                  <a:schemeClr val="tx2"/>
+                </a:solidFill>
+              </a:rPr>
+              <a:t>23항 하지정맥류 근본수술, 방식 확인</a:t>
+            </a:r>
+            <a:endParaRPr lang="en-US" sz="900" dirty="0"/>
+          </a:p>
+        </p:txBody>
+      </p:sp>
+      <p:sp>
+        <p:nvSpPr>
+          <p:cNvPr id="10" name="cov-131-0"/>
+          <p:cNvSpPr txBox="1"/>
+          <p:nvPr/>
+        </p:nvSpPr>
+        <p:spPr>
+          <a:xfrm>
+            <a:off x="5623560" y="1399032"/>
+            <a:ext cx="2834640" cy="292608"/>
+          </a:xfrm>
+          <a:prstGeom prst="rect">
+            <a:avLst/>
+          </a:prstGeom>
+          <a:noFill/>
+          <a:ln/>
+        </p:spPr>
+        <p:txBody>
+          <a:bodyPr wrap="square" lIns="0" tIns="0" rIns="0" bIns="0" rtlCol="0" anchor="ctr"/>
+          <a:lstStyle/>
+          <a:p>
+            <a:pPr indent="0" marL="0">
+              <a:buNone/>
+            </a:pPr>
+            <a:r>
+              <a:rPr lang="en-US" sz="1100" b="1" dirty="0">
+                <a:solidFill>
+                  <a:schemeClr val="accent3"/>
+                </a:solidFill>
+              </a:rPr>
+              <a:t>대상 아님</a:t>
+            </a:r>
+            <a:endParaRPr lang="en-US" sz="1100" dirty="0"/>
+          </a:p>
+        </p:txBody>
+      </p:sp>
+      <p:sp>
+        <p:nvSpPr>
+          <p:cNvPr id="11" name="cov-note-0"/>
+          <p:cNvSpPr txBox="1"/>
+          <p:nvPr/>
+        </p:nvSpPr>
+        <p:spPr>
+          <a:xfrm>
+            <a:off x="5623560" y="1709928"/>
+            <a:ext cx="2834640" cy="237744"/>
+          </a:xfrm>
+          <a:prstGeom prst="rect">
+            <a:avLst/>
+          </a:prstGeom>
+          <a:noFill/>
+          <a:ln/>
+        </p:spPr>
+        <p:txBody>
+          <a:bodyPr wrap="square" lIns="0" tIns="0" rIns="0" bIns="0" rtlCol="0" anchor="ctr"/>
+          <a:lstStyle/>
+          <a:p>
+            <a:pPr indent="0" marL="0">
+              <a:buNone/>
+            </a:pPr>
+            <a:r>
+              <a:rPr lang="en-US" sz="900" dirty="0">
+                <a:solidFill>
+                  <a:schemeClr val="tx2"/>
+                </a:solidFill>
+              </a:rPr>
+              <a:t>신의료기술치료비 특약에 고주파·베나실 명시</a:t>
+            </a:r>
+            <a:endParaRPr lang="en-US" sz="900" dirty="0"/>
+          </a:p>
+        </p:txBody>
+      </p:sp>
+      <p:sp>
+        <p:nvSpPr>
+          <p:cNvPr id="12" name="cov-card-1"/>
+          <p:cNvSpPr/>
+          <p:nvPr/>
+        </p:nvSpPr>
+        <p:spPr>
+          <a:xfrm>
+            <a:off x="548640" y="2093976"/>
+            <a:ext cx="8046720" cy="676656"/>
+          </a:xfrm>
+          <a:prstGeom prst="roundRect">
+            <a:avLst>
+              <a:gd name="adj" fmla="val 20270"/>
+            </a:avLst>
+          </a:prstGeom>
+          <a:solidFill>
+            <a:schemeClr val="bg2"/>
+          </a:solidFill>
+          <a:ln/>
+        </p:spPr>
+      </p:sp>
+      <p:sp>
+        <p:nvSpPr>
+          <p:cNvPr id="13" name="cov-name-1"/>
+          <p:cNvSpPr txBox="1"/>
+          <p:nvPr/>
+        </p:nvSpPr>
+        <p:spPr>
+          <a:xfrm>
+            <a:off x="731520" y="2093976"/>
+            <a:ext cx="2194560" cy="676656"/>
+          </a:xfrm>
+          <a:prstGeom prst="rect">
+            <a:avLst/>
+          </a:prstGeom>
+          <a:noFill/>
+          <a:ln/>
+        </p:spPr>
+        <p:txBody>
+          <a:bodyPr wrap="square" lIns="0" tIns="0" rIns="0" bIns="0" rtlCol="0" anchor="ctr"/>
+          <a:lstStyle/>
+          <a:p>
+            <a:pPr indent="0" marL="0">
+              <a:buNone/>
+            </a:pPr>
+            <a:r>
+              <a:rPr lang="en-US" sz="1200" b="1" dirty="0">
+                <a:solidFill>
+                  <a:schemeClr val="tx1"/>
+                </a:solidFill>
+              </a:rPr>
+              <a:t>신경성형술 (협착증·디스크)</a:t>
+            </a:r>
+            <a:endParaRPr lang="en-US" sz="1200" dirty="0"/>
+          </a:p>
+        </p:txBody>
+      </p:sp>
+      <p:sp>
+        <p:nvSpPr>
+          <p:cNvPr id="14" name="cov-grade-1"/>
+          <p:cNvSpPr/>
+          <p:nvPr/>
+        </p:nvSpPr>
+        <p:spPr>
+          <a:xfrm>
+            <a:off x="3063240" y="2203704"/>
+            <a:ext cx="960120" cy="274320"/>
+          </a:xfrm>
+          <a:prstGeom prst="roundRect">
+            <a:avLst>
+              <a:gd name="adj" fmla="val 50000"/>
+            </a:avLst>
+          </a:prstGeom>
+          <a:solidFill>
+            <a:srgbClr val="FFF3E0"/>
+          </a:solidFill>
+          <a:ln/>
+        </p:spPr>
+        <p:txBody>
+          <a:bodyPr wrap="square" lIns="0" tIns="0" rIns="0" bIns="0" rtlCol="0" anchor="ctr"/>
+          <a:lstStyle/>
+          <a:p>
+            <a:pPr algn="ctr" indent="0" marL="0">
+              <a:buNone/>
+            </a:pPr>
+            <a:r>
+              <a:rPr lang="en-US" sz="1100" b="1" dirty="0">
+                <a:solidFill>
+                  <a:srgbClr val="D9480F"/>
+                </a:solidFill>
+              </a:rPr>
+              <a:t>확인 필요</a:t>
+            </a:r>
+            <a:endParaRPr lang="en-US" sz="1100" dirty="0"/>
+          </a:p>
+        </p:txBody>
+      </p:sp>
+      <p:sp>
+        <p:nvSpPr>
+          <p:cNvPr id="15" name="cov-gnote-1"/>
+          <p:cNvSpPr txBox="1"/>
+          <p:nvPr/>
+        </p:nvSpPr>
+        <p:spPr>
+          <a:xfrm>
+            <a:off x="3063240" y="2505456"/>
+            <a:ext cx="2423160" cy="219456"/>
+          </a:xfrm>
+          <a:prstGeom prst="rect">
+            <a:avLst/>
+          </a:prstGeom>
+          <a:noFill/>
+          <a:ln/>
+        </p:spPr>
+        <p:txBody>
+          <a:bodyPr wrap="square" lIns="0" tIns="0" rIns="0" bIns="0" rtlCol="0" anchor="ctr"/>
+          <a:lstStyle/>
+          <a:p>
+            <a:pPr indent="0" marL="0">
+              <a:buNone/>
+            </a:pPr>
+            <a:r>
+              <a:rPr lang="en-US" sz="900" dirty="0">
+                <a:solidFill>
+                  <a:schemeClr val="tx2"/>
+                </a:solidFill>
+              </a:rPr>
+              <a:t>인정 시 88-2 척추 2종</a:t>
+            </a:r>
+            <a:endParaRPr lang="en-US" sz="900" dirty="0"/>
+          </a:p>
+        </p:txBody>
+      </p:sp>
+      <p:sp>
+        <p:nvSpPr>
+          <p:cNvPr id="16" name="cov-131-1"/>
+          <p:cNvSpPr txBox="1"/>
+          <p:nvPr/>
+        </p:nvSpPr>
+        <p:spPr>
+          <a:xfrm>
+            <a:off x="5623560" y="2167128"/>
+            <a:ext cx="2834640" cy="292608"/>
+          </a:xfrm>
+          <a:prstGeom prst="rect">
+            <a:avLst/>
+          </a:prstGeom>
+          <a:noFill/>
+          <a:ln/>
+        </p:spPr>
+        <p:txBody>
+          <a:bodyPr wrap="square" lIns="0" tIns="0" rIns="0" bIns="0" rtlCol="0" anchor="ctr"/>
+          <a:lstStyle/>
+          <a:p>
+            <a:pPr indent="0" marL="0">
+              <a:buNone/>
+            </a:pPr>
+            <a:r>
+              <a:rPr lang="en-US" sz="1100" b="1" dirty="0">
+                <a:solidFill>
+                  <a:schemeClr val="accent1"/>
+                </a:solidFill>
+              </a:rPr>
+              <a:t>[다빈도] 척추병증</a:t>
+            </a:r>
+            <a:endParaRPr lang="en-US" sz="1100" dirty="0"/>
+          </a:p>
+        </p:txBody>
+      </p:sp>
+      <p:sp>
+        <p:nvSpPr>
+          <p:cNvPr id="17" name="cov-note-1"/>
+          <p:cNvSpPr txBox="1"/>
+          <p:nvPr/>
+        </p:nvSpPr>
+        <p:spPr>
+          <a:xfrm>
+            <a:off x="5623560" y="2478024"/>
+            <a:ext cx="2834640" cy="237744"/>
+          </a:xfrm>
+          <a:prstGeom prst="rect">
+            <a:avLst/>
+          </a:prstGeom>
+          <a:noFill/>
+          <a:ln/>
+        </p:spPr>
+        <p:txBody>
+          <a:bodyPr wrap="square" lIns="0" tIns="0" rIns="0" bIns="0" rtlCol="0" anchor="ctr"/>
+          <a:lstStyle/>
+          <a:p>
+            <a:pPr indent="0" marL="0">
+              <a:buNone/>
+            </a:pPr>
+            <a:r>
+              <a:rPr lang="en-US" sz="900" dirty="0">
+                <a:solidFill>
+                  <a:schemeClr val="tx2"/>
+                </a:solidFill>
+              </a:rPr>
+              <a:t>130대는 허리디스크(M51) 없음</a:t>
+            </a:r>
+            <a:endParaRPr lang="en-US" sz="900" dirty="0"/>
+          </a:p>
+        </p:txBody>
+      </p:sp>
+      <p:sp>
+        <p:nvSpPr>
+          <p:cNvPr id="18" name="cov-card-2"/>
+          <p:cNvSpPr/>
+          <p:nvPr/>
+        </p:nvSpPr>
+        <p:spPr>
+          <a:xfrm>
+            <a:off x="548640" y="2862072"/>
+            <a:ext cx="8046720" cy="676656"/>
+          </a:xfrm>
+          <a:prstGeom prst="roundRect">
+            <a:avLst>
+              <a:gd name="adj" fmla="val 20270"/>
+            </a:avLst>
+          </a:prstGeom>
+          <a:solidFill>
+            <a:schemeClr val="bg2"/>
+          </a:solidFill>
+          <a:ln/>
+        </p:spPr>
+      </p:sp>
+      <p:sp>
+        <p:nvSpPr>
+          <p:cNvPr id="19" name="cov-name-2"/>
+          <p:cNvSpPr txBox="1"/>
+          <p:nvPr/>
+        </p:nvSpPr>
+        <p:spPr>
+          <a:xfrm>
+            <a:off x="731520" y="2862072"/>
+            <a:ext cx="2194560" cy="676656"/>
+          </a:xfrm>
+          <a:prstGeom prst="rect">
+            <a:avLst/>
+          </a:prstGeom>
+          <a:noFill/>
+          <a:ln/>
+        </p:spPr>
+        <p:txBody>
+          <a:bodyPr wrap="square" lIns="0" tIns="0" rIns="0" bIns="0" rtlCol="0" anchor="ctr"/>
+          <a:lstStyle/>
+          <a:p>
+            <a:pPr indent="0" marL="0">
+              <a:buNone/>
+            </a:pPr>
+            <a:r>
+              <a:rPr lang="en-US" sz="1200" b="1" dirty="0">
+                <a:solidFill>
+                  <a:schemeClr val="tx1"/>
+                </a:solidFill>
+              </a:rPr>
+              <a:t>전립선 결찰술 (전립선비대증)</a:t>
+            </a:r>
+            <a:endParaRPr lang="en-US" sz="1200" dirty="0"/>
+          </a:p>
+        </p:txBody>
+      </p:sp>
+      <p:sp>
+        <p:nvSpPr>
+          <p:cNvPr id="20" name="cov-grade-2"/>
+          <p:cNvSpPr/>
+          <p:nvPr/>
+        </p:nvSpPr>
+        <p:spPr>
+          <a:xfrm>
+            <a:off x="3063240" y="2971800"/>
+            <a:ext cx="960120" cy="274320"/>
+          </a:xfrm>
+          <a:prstGeom prst="roundRect">
+            <a:avLst>
+              <a:gd name="adj" fmla="val 50000"/>
+            </a:avLst>
+          </a:prstGeom>
+          <a:solidFill>
+            <a:srgbClr val="FFF3E0"/>
+          </a:solidFill>
+          <a:ln/>
+        </p:spPr>
+        <p:txBody>
+          <a:bodyPr wrap="square" lIns="0" tIns="0" rIns="0" bIns="0" rtlCol="0" anchor="ctr"/>
+          <a:lstStyle/>
+          <a:p>
+            <a:pPr algn="ctr" indent="0" marL="0">
+              <a:buNone/>
+            </a:pPr>
+            <a:r>
+              <a:rPr lang="en-US" sz="1100" b="1" dirty="0">
+                <a:solidFill>
+                  <a:srgbClr val="D9480F"/>
+                </a:solidFill>
+              </a:rPr>
+              <a:t>확인 필요</a:t>
+            </a:r>
+            <a:endParaRPr lang="en-US" sz="1100" dirty="0"/>
+          </a:p>
+        </p:txBody>
+      </p:sp>
+      <p:sp>
+        <p:nvSpPr>
+          <p:cNvPr id="21" name="cov-gnote-2"/>
+          <p:cNvSpPr txBox="1"/>
+          <p:nvPr/>
+        </p:nvSpPr>
+        <p:spPr>
+          <a:xfrm>
+            <a:off x="3063240" y="3273552"/>
+            <a:ext cx="2423160" cy="219456"/>
+          </a:xfrm>
+          <a:prstGeom prst="rect">
+            <a:avLst/>
+          </a:prstGeom>
+          <a:noFill/>
+          <a:ln/>
+        </p:spPr>
+        <p:txBody>
+          <a:bodyPr wrap="square" lIns="0" tIns="0" rIns="0" bIns="0" rtlCol="0" anchor="ctr"/>
+          <a:lstStyle/>
+          <a:p>
+            <a:pPr indent="0" marL="0">
+              <a:buNone/>
+            </a:pPr>
+            <a:r>
+              <a:rPr lang="en-US" sz="900" dirty="0">
+                <a:solidFill>
+                  <a:schemeClr val="tx2"/>
+                </a:solidFill>
+              </a:rPr>
+              <a:t>인정 시 88-3 비뇨기 1종</a:t>
+            </a:r>
+            <a:endParaRPr lang="en-US" sz="900" dirty="0"/>
+          </a:p>
+        </p:txBody>
+      </p:sp>
+      <p:sp>
+        <p:nvSpPr>
+          <p:cNvPr id="22" name="cov-131-2"/>
+          <p:cNvSpPr txBox="1"/>
+          <p:nvPr/>
+        </p:nvSpPr>
+        <p:spPr>
+          <a:xfrm>
+            <a:off x="5623560" y="2935224"/>
+            <a:ext cx="2834640" cy="292608"/>
+          </a:xfrm>
+          <a:prstGeom prst="rect">
+            <a:avLst/>
+          </a:prstGeom>
+          <a:noFill/>
+          <a:ln/>
+        </p:spPr>
+        <p:txBody>
+          <a:bodyPr wrap="square" lIns="0" tIns="0" rIns="0" bIns="0" rtlCol="0" anchor="ctr"/>
+          <a:lstStyle/>
+          <a:p>
+            <a:pPr indent="0" marL="0">
+              <a:buNone/>
+            </a:pPr>
+            <a:r>
+              <a:rPr lang="en-US" sz="1100" b="1" dirty="0">
+                <a:solidFill>
+                  <a:schemeClr val="accent1"/>
+                </a:solidFill>
+              </a:rPr>
+              <a:t>[관절염,생식기질환]</a:t>
+            </a:r>
+            <a:endParaRPr lang="en-US" sz="1100" dirty="0"/>
+          </a:p>
+        </p:txBody>
+      </p:sp>
+      <p:sp>
+        <p:nvSpPr>
+          <p:cNvPr id="23" name="cov-note-2"/>
+          <p:cNvSpPr txBox="1"/>
+          <p:nvPr/>
+        </p:nvSpPr>
+        <p:spPr>
+          <a:xfrm>
+            <a:off x="5623560" y="3246120"/>
+            <a:ext cx="2834640" cy="237744"/>
+          </a:xfrm>
+          <a:prstGeom prst="rect">
+            <a:avLst/>
+          </a:prstGeom>
+          <a:noFill/>
+          <a:ln/>
+        </p:spPr>
+        <p:txBody>
+          <a:bodyPr wrap="square" lIns="0" tIns="0" rIns="0" bIns="0" rtlCol="0" anchor="ctr"/>
+          <a:lstStyle/>
+          <a:p>
+            <a:pPr indent="0" marL="0">
+              <a:buNone/>
+            </a:pPr>
+            <a:r>
+              <a:rPr lang="en-US" sz="900" dirty="0">
+                <a:solidFill>
+                  <a:schemeClr val="tx2"/>
+                </a:solidFill>
+              </a:rPr>
+              <a:t>신의료기술치료비 특약에 유로리프트 명시</a:t>
+            </a:r>
+            <a:endParaRPr lang="en-US" sz="900" dirty="0"/>
+          </a:p>
+        </p:txBody>
+      </p:sp>
+      <p:sp>
+        <p:nvSpPr>
+          <p:cNvPr id="24" name="cov-card-3"/>
+          <p:cNvSpPr/>
+          <p:nvPr/>
+        </p:nvSpPr>
+        <p:spPr>
+          <a:xfrm>
+            <a:off x="548640" y="3630168"/>
+            <a:ext cx="8046720" cy="676656"/>
+          </a:xfrm>
+          <a:prstGeom prst="roundRect">
+            <a:avLst>
+              <a:gd name="adj" fmla="val 20270"/>
+            </a:avLst>
+          </a:prstGeom>
+          <a:solidFill>
+            <a:schemeClr val="bg2"/>
+          </a:solidFill>
+          <a:ln/>
+        </p:spPr>
+      </p:sp>
+      <p:sp>
+        <p:nvSpPr>
+          <p:cNvPr id="25" name="cov-name-3"/>
+          <p:cNvSpPr txBox="1"/>
+          <p:nvPr/>
+        </p:nvSpPr>
+        <p:spPr>
+          <a:xfrm>
+            <a:off x="731520" y="3630168"/>
+            <a:ext cx="2194560" cy="676656"/>
+          </a:xfrm>
+          <a:prstGeom prst="rect">
+            <a:avLst/>
+          </a:prstGeom>
+          <a:noFill/>
+          <a:ln/>
+        </p:spPr>
+        <p:txBody>
+          <a:bodyPr wrap="square" lIns="0" tIns="0" rIns="0" bIns="0" rtlCol="0" anchor="ctr"/>
+          <a:lstStyle/>
+          <a:p>
+            <a:pPr indent="0" marL="0">
+              <a:buNone/>
+            </a:pPr>
+            <a:r>
+              <a:rPr lang="en-US" sz="1200" b="1" dirty="0">
+                <a:solidFill>
+                  <a:schemeClr val="tx1"/>
+                </a:solidFill>
+              </a:rPr>
+              <a:t>무릎 골수 주사 (관절염)</a:t>
+            </a:r>
+            <a:endParaRPr lang="en-US" sz="1200" dirty="0"/>
+          </a:p>
+        </p:txBody>
+      </p:sp>
+      <p:sp>
+        <p:nvSpPr>
+          <p:cNvPr id="26" name="cov-grade-3"/>
+          <p:cNvSpPr/>
+          <p:nvPr/>
+        </p:nvSpPr>
+        <p:spPr>
+          <a:xfrm>
+            <a:off x="3063240" y="3739896"/>
+            <a:ext cx="960120" cy="274320"/>
+          </a:xfrm>
+          <a:prstGeom prst="roundRect">
+            <a:avLst>
+              <a:gd name="adj" fmla="val 50000"/>
+            </a:avLst>
+          </a:prstGeom>
+          <a:solidFill>
+            <a:schemeClr val="bg1"/>
+          </a:solidFill>
+          <a:ln/>
+        </p:spPr>
+        <p:txBody>
+          <a:bodyPr wrap="square" lIns="0" tIns="0" rIns="0" bIns="0" rtlCol="0" anchor="ctr"/>
+          <a:lstStyle/>
+          <a:p>
+            <a:pPr algn="ctr" indent="0" marL="0">
+              <a:buNone/>
+            </a:pPr>
+            <a:r>
+              <a:rPr lang="en-US" sz="1100" b="1" dirty="0">
+                <a:solidFill>
+                  <a:schemeClr val="accent3"/>
+                </a:solidFill>
+              </a:rPr>
+              <a:t>해당 없음</a:t>
+            </a:r>
+            <a:endParaRPr lang="en-US" sz="1100" dirty="0"/>
+          </a:p>
+        </p:txBody>
+      </p:sp>
+      <p:sp>
+        <p:nvSpPr>
+          <p:cNvPr id="27" name="cov-gnote-3"/>
+          <p:cNvSpPr txBox="1"/>
+          <p:nvPr/>
+        </p:nvSpPr>
+        <p:spPr>
+          <a:xfrm>
+            <a:off x="3063240" y="4041648"/>
+            <a:ext cx="2423160" cy="219456"/>
+          </a:xfrm>
+          <a:prstGeom prst="rect">
+            <a:avLst/>
+          </a:prstGeom>
+          <a:noFill/>
+          <a:ln/>
+        </p:spPr>
+        <p:txBody>
+          <a:bodyPr wrap="square" lIns="0" tIns="0" rIns="0" bIns="0" rtlCol="0" anchor="ctr"/>
+          <a:lstStyle/>
+          <a:p>
+            <a:pPr indent="0" marL="0">
+              <a:buNone/>
+            </a:pPr>
+            <a:r>
+              <a:rPr lang="en-US" sz="900" dirty="0">
+                <a:solidFill>
+                  <a:schemeClr val="tx2"/>
+                </a:solidFill>
+              </a:rPr>
+              <a:t>주사·흡인은 약관상 수술 아님</a:t>
+            </a:r>
+            <a:endParaRPr lang="en-US" sz="900" dirty="0"/>
+          </a:p>
+        </p:txBody>
+      </p:sp>
+      <p:sp>
+        <p:nvSpPr>
+          <p:cNvPr id="28" name="cov-131-3"/>
+          <p:cNvSpPr txBox="1"/>
+          <p:nvPr/>
+        </p:nvSpPr>
+        <p:spPr>
+          <a:xfrm>
+            <a:off x="5623560" y="3703320"/>
+            <a:ext cx="2834640" cy="292608"/>
+          </a:xfrm>
+          <a:prstGeom prst="rect">
+            <a:avLst/>
+          </a:prstGeom>
+          <a:noFill/>
+          <a:ln/>
+        </p:spPr>
+        <p:txBody>
+          <a:bodyPr wrap="square" lIns="0" tIns="0" rIns="0" bIns="0" rtlCol="0" anchor="ctr"/>
+          <a:lstStyle/>
+          <a:p>
+            <a:pPr indent="0" marL="0">
+              <a:buNone/>
+            </a:pPr>
+            <a:r>
+              <a:rPr lang="en-US" sz="1100" b="1" dirty="0">
+                <a:solidFill>
+                  <a:schemeClr val="accent3"/>
+                </a:solidFill>
+              </a:rPr>
+              <a:t>해당 없음</a:t>
+            </a:r>
+            <a:endParaRPr lang="en-US" sz="1100" dirty="0"/>
+          </a:p>
+        </p:txBody>
+      </p:sp>
+      <p:sp>
+        <p:nvSpPr>
+          <p:cNvPr id="29" name="cov-note-3"/>
+          <p:cNvSpPr txBox="1"/>
+          <p:nvPr/>
+        </p:nvSpPr>
+        <p:spPr>
+          <a:xfrm>
+            <a:off x="5623560" y="4014216"/>
+            <a:ext cx="2834640" cy="237744"/>
+          </a:xfrm>
+          <a:prstGeom prst="rect">
+            <a:avLst/>
+          </a:prstGeom>
+          <a:noFill/>
+          <a:ln/>
+        </p:spPr>
+        <p:txBody>
+          <a:bodyPr wrap="square" lIns="0" tIns="0" rIns="0" bIns="0" rtlCol="0" anchor="ctr"/>
+          <a:lstStyle/>
+          <a:p>
+            <a:pPr indent="0" marL="0">
+              <a:buNone/>
+            </a:pPr>
+            <a:r>
+              <a:rPr lang="en-US" sz="900" dirty="0">
+                <a:solidFill>
+                  <a:schemeClr val="tx2"/>
+                </a:solidFill>
+              </a:rPr>
+              <a:t>수술비 특약 대상 아님</a:t>
+            </a:r>
+            <a:endParaRPr lang="en-US" sz="900" dirty="0"/>
+          </a:p>
+        </p:txBody>
+      </p:sp>
+      <p:sp>
+        <p:nvSpPr>
+          <p:cNvPr id="30" name="source"/>
+          <p:cNvSpPr txBox="1"/>
+          <p:nvPr/>
+        </p:nvSpPr>
+        <p:spPr>
+          <a:xfrm>
+            <a:off x="548640" y="4443984"/>
+            <a:ext cx="8046720" cy="274320"/>
+          </a:xfrm>
+          <a:prstGeom prst="rect">
+            <a:avLst/>
+          </a:prstGeom>
+          <a:noFill/>
+          <a:ln/>
+        </p:spPr>
+        <p:txBody>
+          <a:bodyPr wrap="square" lIns="0" tIns="0" rIns="0" bIns="0" rtlCol="0" anchor="ctr"/>
+          <a:lstStyle/>
+          <a:p>
+            <a:pPr indent="0" marL="0">
+              <a:buNone/>
+            </a:pPr>
+            <a:r>
+              <a:rPr lang="en-US" sz="900" dirty="0">
+                <a:solidFill>
+                  <a:schemeClr val="accent3"/>
+                </a:solidFill>
+              </a:rPr>
+              <a:t>근거: 당사 약관 1-5종 수술분류표Ⅱ·131대/130대 질병군. '확인 필요' = 분류표에 이름이 없어 보상 부서 확인 필요</a:t>
+            </a:r>
+            <a:endParaRPr lang="en-US" sz="900" dirty="0"/>
+          </a:p>
+        </p:txBody>
+      </p:sp>
+      <p:sp>
+        <p:nvSpPr>
+          <p:cNvPr id="25" name="Slide Number Placeholder 0"/>
+          <p:cNvSpPr>
+            <a:spLocks noGrp="1"/>
+          </p:cNvSpPr>
+          <p:nvPr>
+            <p:ph type="sldNum" sz="quarter" idx="4294967295"/>
+          </p:nvPr>
+        </p:nvSpPr>
+        <p:spPr>
+          <a:xfrm>
+            <a:off x="8229600" y="4773168"/>
+            <a:ext cx="365760" cy="228600"/>
+          </a:xfrm>
+          <a:prstGeom prst="rect">
+            <a:avLst/>
+          </a:prstGeom>
+          <a:extLst>
+            <a:ext uri="{C572A759-6A51-4108-AA02-DFA0A04FC94B}">
+              <ma14:wrappingTextBoxFlag xmlns:ma14="http://schemas.microsoft.com/office/mac/drawingml/2011/main" val="0"/>
+            </a:ext>
+          </a:extLst>
+        </p:spPr>
+        <p:txBody>
+          <a:bodyPr/>
+          <a:lstStyle>
+            <a:lvl1pPr>
+              <a:defRPr sz="900">
+                <a:solidFill>
+                  <a:schemeClr val="accent3"/>
+                </a:solidFill>
+              </a:defRPr>
+            </a:lvl1pPr>
+          </a:lstStyle>
+          <a:p>
+            <a:pPr algn="r"/>
+            <a:fld id="{F7021451-1387-4CA6-816F-3879F97B5CBC}" type="slidenum">
+              <a:rPr b="0" lang="en-US"/>
+              <a:t>17</a:t>
+            </a:fld>
+            <a:endParaRPr lang="en-US"/>
+          </a:p>
+        </p:txBody>
+      </p:sp>
+    </p:spTree>
+  </p:cSld>
+  <p:clrMapOvr>
+    <a:masterClrMapping/>
+  </p:clrMapOvr>
+</p:sld>
+</file>
+
+<file path=ppt/slides/slide18.xml><?xml version="1.0" encoding="utf-8"?>
+<p:sld xmlns:a="http://schemas.openxmlformats.org/drawingml/2006/main" xmlns:r="http://schemas.openxmlformats.org/officeDocument/2006/relationships" xmlns:p="http://schemas.openxmlformats.org/presentationml/2006/main">
+  <p:cSld name="Slide 18">
+    <p:spTree>
+      <p:nvGrpSpPr>
+        <p:cNvPr id="1" name=""/>
+        <p:cNvGrpSpPr/>
+        <p:nvPr/>
+      </p:nvGrpSpPr>
+      <p:grpSpPr>
+        <a:xfrm>
+          <a:off x="0" y="0"/>
+          <a:ext cx="0" cy="0"/>
+          <a:chOff x="0" y="0"/>
+          <a:chExt cx="0" cy="0"/>
+        </a:xfrm>
+      </p:grpSpPr>
+      <p:sp>
+        <p:nvSpPr>
+          <p:cNvPr id="2" name="Text 1"/>
+          <p:cNvSpPr/>
+          <p:nvPr>
+            <p:ph idx="101" type="title" hasCustomPrompt="1"/>
+          </p:nvPr>
+        </p:nvSpPr>
+        <p:spPr>
+          <a:xfrm>
+            <a:off x="548640" y="384048"/>
+            <a:ext cx="8046720" cy="548640"/>
+          </a:xfrm>
+          <a:prstGeom prst="rect">
+            <a:avLst/>
+          </a:prstGeom>
+          <a:noFill/>
+          <a:ln/>
+        </p:spPr>
+        <p:txBody>
+          <a:bodyPr wrap="square" lIns="0" tIns="0" rIns="0" bIns="0" rtlCol="0" anchor="ctr"/>
+          <a:lstStyle/>
+          <a:p>
+            <a:pPr algn="l" indent="0" marL="0">
+              <a:buNone/>
+            </a:pPr>
+            <a:r>
+              <a:rPr lang="en-US" sz="2600" b="1" dirty="0">
+                <a:solidFill>
+                  <a:schemeClr val="tx1"/>
+                </a:solidFill>
+              </a:rPr>
+              <a:t>이렇게 안내해 보세요</a:t>
+            </a:r>
+            <a:endParaRPr lang="en-US" sz="2600" dirty="0"/>
+          </a:p>
+        </p:txBody>
+      </p:sp>
+      <p:sp>
+        <p:nvSpPr>
+          <p:cNvPr id="3" name="case-card-0"/>
+          <p:cNvSpPr/>
+          <p:nvPr/>
+        </p:nvSpPr>
+        <p:spPr>
+          <a:xfrm>
+            <a:off x="548640" y="1097280"/>
+            <a:ext cx="3931920" cy="3154680"/>
+          </a:xfrm>
+          <a:prstGeom prst="roundRect">
+            <a:avLst>
+              <a:gd name="adj" fmla="val 5797"/>
+            </a:avLst>
+          </a:prstGeom>
+          <a:solidFill>
+            <a:schemeClr val="bg2"/>
+          </a:solidFill>
+          <a:ln/>
+        </p:spPr>
+      </p:sp>
+      <p:sp>
+        <p:nvSpPr>
+          <p:cNvPr id="4" name="case-h-0"/>
+          <p:cNvSpPr txBox="1"/>
+          <p:nvPr/>
+        </p:nvSpPr>
+        <p:spPr>
+          <a:xfrm>
+            <a:off x="822960" y="1280160"/>
+            <a:ext cx="3383280" cy="292608"/>
+          </a:xfrm>
+          <a:prstGeom prst="rect">
+            <a:avLst/>
+          </a:prstGeom>
+          <a:noFill/>
+          <a:ln/>
+        </p:spPr>
+        <p:txBody>
+          <a:bodyPr wrap="square" lIns="0" tIns="0" rIns="0" bIns="0" rtlCol="0" anchor="ctr"/>
+          <a:lstStyle/>
+          <a:p>
+            <a:pPr indent="0" marL="0">
+              <a:buNone/>
+            </a:pPr>
+            <a:r>
+              <a:rPr lang="en-US" sz="1300" b="1" dirty="0">
+                <a:solidFill>
+                  <a:schemeClr val="tx2"/>
+                </a:solidFill>
+              </a:rPr>
+              <a:t>전립선암 로봇수술</a:t>
+            </a:r>
+            <a:endParaRPr lang="en-US" sz="1300" dirty="0"/>
+          </a:p>
+        </p:txBody>
+      </p:sp>
+      <p:sp>
+        <p:nvSpPr>
+          <p:cNvPr id="5" name="case-cost-0"/>
+          <p:cNvSpPr txBox="1"/>
+          <p:nvPr/>
+        </p:nvSpPr>
+        <p:spPr>
+          <a:xfrm>
+            <a:off x="822960" y="1600200"/>
+            <a:ext cx="3383280" cy="548640"/>
+          </a:xfrm>
+          <a:prstGeom prst="rect">
+            <a:avLst/>
+          </a:prstGeom>
+          <a:noFill/>
+          <a:ln/>
+        </p:spPr>
+        <p:txBody>
+          <a:bodyPr wrap="square" lIns="0" tIns="0" rIns="0" bIns="0" rtlCol="0" anchor="ctr"/>
+          <a:lstStyle/>
+          <a:p>
+            <a:pPr indent="0" marL="0">
+              <a:buNone/>
+            </a:pPr>
+            <a:r>
+              <a:rPr lang="en-US" sz="3000" b="1" dirty="0">
+                <a:solidFill>
+                  <a:schemeClr val="tx1"/>
+                </a:solidFill>
+              </a:rPr>
+              <a:t>1,000만원</a:t>
+            </a:r>
+            <a:endParaRPr lang="en-US" sz="3000" dirty="0"/>
+          </a:p>
+        </p:txBody>
+      </p:sp>
+      <p:sp>
+        <p:nvSpPr>
+          <p:cNvPr id="6" name="case-row-0-0"/>
+          <p:cNvSpPr/>
+          <p:nvPr/>
+        </p:nvSpPr>
+        <p:spPr>
+          <a:xfrm>
+            <a:off x="731520" y="2377440"/>
+            <a:ext cx="3566160" cy="475488"/>
+          </a:xfrm>
+          <a:prstGeom prst="roundRect">
+            <a:avLst>
+              <a:gd name="adj" fmla="val 23077"/>
+            </a:avLst>
+          </a:prstGeom>
+          <a:solidFill>
+            <a:schemeClr val="bg1"/>
+          </a:solidFill>
+          <a:ln/>
+        </p:spPr>
+      </p:sp>
+      <p:sp>
+        <p:nvSpPr>
+          <p:cNvPr id="7" name="case-k-0-0"/>
+          <p:cNvSpPr txBox="1"/>
+          <p:nvPr/>
+        </p:nvSpPr>
+        <p:spPr>
+          <a:xfrm>
+            <a:off x="914400" y="2377440"/>
+            <a:ext cx="1737360" cy="475488"/>
+          </a:xfrm>
+          <a:prstGeom prst="rect">
+            <a:avLst/>
+          </a:prstGeom>
+          <a:noFill/>
+          <a:ln/>
+        </p:spPr>
+        <p:txBody>
+          <a:bodyPr wrap="square" lIns="0" tIns="0" rIns="0" bIns="0" rtlCol="0" anchor="ctr"/>
+          <a:lstStyle/>
+          <a:p>
+            <a:pPr indent="0" marL="0">
+              <a:buNone/>
+            </a:pPr>
+            <a:r>
+              <a:rPr lang="en-US" sz="1200" dirty="0">
+                <a:solidFill>
+                  <a:schemeClr val="tx2"/>
+                </a:solidFill>
+              </a:rPr>
+              <a:t>5세대 실손 본인부담</a:t>
+            </a:r>
+            <a:endParaRPr lang="en-US" sz="1200" dirty="0"/>
+          </a:p>
+        </p:txBody>
+      </p:sp>
+      <p:sp>
+        <p:nvSpPr>
+          <p:cNvPr id="8" name="case-v-0-0"/>
+          <p:cNvSpPr txBox="1"/>
+          <p:nvPr/>
+        </p:nvSpPr>
+        <p:spPr>
+          <a:xfrm>
+            <a:off x="2560320" y="2377440"/>
+            <a:ext cx="1600200" cy="475488"/>
+          </a:xfrm>
+          <a:prstGeom prst="rect">
+            <a:avLst/>
+          </a:prstGeom>
+          <a:noFill/>
+          <a:ln/>
+        </p:spPr>
+        <p:txBody>
+          <a:bodyPr wrap="square" lIns="0" tIns="0" rIns="0" bIns="0" rtlCol="0" anchor="ctr"/>
+          <a:lstStyle/>
+          <a:p>
+            <a:pPr algn="r" indent="0" marL="0">
+              <a:buNone/>
+            </a:pPr>
+            <a:r>
+              <a:rPr lang="en-US" sz="1200" b="1" dirty="0">
+                <a:solidFill>
+                  <a:schemeClr val="accent5"/>
+                </a:solidFill>
+              </a:rPr>
+              <a:t>300만원</a:t>
+            </a:r>
+            <a:endParaRPr lang="en-US" sz="1200" dirty="0"/>
+          </a:p>
+        </p:txBody>
+      </p:sp>
+      <p:sp>
+        <p:nvSpPr>
+          <p:cNvPr id="9" name="case-row-0-1"/>
+          <p:cNvSpPr/>
+          <p:nvPr/>
+        </p:nvSpPr>
+        <p:spPr>
+          <a:xfrm>
+            <a:off x="731520" y="2944368"/>
+            <a:ext cx="3566160" cy="475488"/>
+          </a:xfrm>
+          <a:prstGeom prst="roundRect">
+            <a:avLst>
+              <a:gd name="adj" fmla="val 23077"/>
+            </a:avLst>
+          </a:prstGeom>
+          <a:solidFill>
+            <a:schemeClr val="accent2"/>
+          </a:solidFill>
+          <a:ln/>
+        </p:spPr>
+      </p:sp>
+      <p:sp>
+        <p:nvSpPr>
+          <p:cNvPr id="10" name="case-k-0-1"/>
+          <p:cNvSpPr txBox="1"/>
+          <p:nvPr/>
+        </p:nvSpPr>
+        <p:spPr>
+          <a:xfrm>
+            <a:off x="914400" y="2944368"/>
+            <a:ext cx="1737360" cy="475488"/>
+          </a:xfrm>
+          <a:prstGeom prst="rect">
+            <a:avLst/>
+          </a:prstGeom>
+          <a:noFill/>
+          <a:ln/>
+        </p:spPr>
+        <p:txBody>
+          <a:bodyPr wrap="square" lIns="0" tIns="0" rIns="0" bIns="0" rtlCol="0" anchor="ctr"/>
+          <a:lstStyle/>
+          <a:p>
+            <a:pPr indent="0" marL="0">
+              <a:buNone/>
+            </a:pPr>
+            <a:r>
+              <a:rPr lang="en-US" sz="1200" dirty="0">
+                <a:solidFill>
+                  <a:schemeClr val="tx2"/>
+                </a:solidFill>
+              </a:rPr>
+              <a:t>1-5종 수술비</a:t>
+            </a:r>
+            <a:endParaRPr lang="en-US" sz="1200" dirty="0"/>
+          </a:p>
+        </p:txBody>
+      </p:sp>
+      <p:sp>
+        <p:nvSpPr>
+          <p:cNvPr id="11" name="case-v-0-1"/>
+          <p:cNvSpPr txBox="1"/>
+          <p:nvPr/>
+        </p:nvSpPr>
+        <p:spPr>
+          <a:xfrm>
+            <a:off x="2560320" y="2944368"/>
+            <a:ext cx="1600200" cy="475488"/>
+          </a:xfrm>
+          <a:prstGeom prst="rect">
+            <a:avLst/>
+          </a:prstGeom>
+          <a:noFill/>
+          <a:ln/>
+        </p:spPr>
+        <p:txBody>
+          <a:bodyPr wrap="square" lIns="0" tIns="0" rIns="0" bIns="0" rtlCol="0" anchor="ctr"/>
+          <a:lstStyle/>
+          <a:p>
+            <a:pPr algn="r" indent="0" marL="0">
+              <a:buNone/>
+            </a:pPr>
+            <a:r>
+              <a:rPr lang="en-US" sz="1200" b="1" dirty="0">
+                <a:solidFill>
+                  <a:schemeClr val="accent1"/>
+                </a:solidFill>
+              </a:rPr>
+              <a:t>악성신생물 3~5종</a:t>
+            </a:r>
+            <a:endParaRPr lang="en-US" sz="1200" dirty="0"/>
+          </a:p>
+        </p:txBody>
+      </p:sp>
+      <p:sp>
+        <p:nvSpPr>
+          <p:cNvPr id="12" name="case-row-0-2"/>
+          <p:cNvSpPr/>
+          <p:nvPr/>
+        </p:nvSpPr>
+        <p:spPr>
+          <a:xfrm>
+            <a:off x="731520" y="3511296"/>
+            <a:ext cx="3566160" cy="475488"/>
+          </a:xfrm>
+          <a:prstGeom prst="roundRect">
+            <a:avLst>
+              <a:gd name="adj" fmla="val 23077"/>
+            </a:avLst>
+          </a:prstGeom>
+          <a:solidFill>
+            <a:schemeClr val="accent2"/>
+          </a:solidFill>
+          <a:ln/>
+        </p:spPr>
+      </p:sp>
+      <p:sp>
+        <p:nvSpPr>
+          <p:cNvPr id="13" name="case-k-0-2"/>
+          <p:cNvSpPr txBox="1"/>
+          <p:nvPr/>
+        </p:nvSpPr>
+        <p:spPr>
+          <a:xfrm>
+            <a:off x="914400" y="3511296"/>
+            <a:ext cx="1737360" cy="475488"/>
+          </a:xfrm>
+          <a:prstGeom prst="rect">
+            <a:avLst/>
+          </a:prstGeom>
+          <a:noFill/>
+          <a:ln/>
+        </p:spPr>
+        <p:txBody>
+          <a:bodyPr wrap="square" lIns="0" tIns="0" rIns="0" bIns="0" rtlCol="0" anchor="ctr"/>
+          <a:lstStyle/>
+          <a:p>
+            <a:pPr indent="0" marL="0">
+              <a:buNone/>
+            </a:pPr>
+            <a:r>
+              <a:rPr lang="en-US" sz="1200" dirty="0">
+                <a:solidFill>
+                  <a:schemeClr val="tx2"/>
+                </a:solidFill>
+              </a:rPr>
+              <a:t>다빈치로봇 암수술비</a:t>
+            </a:r>
+            <a:endParaRPr lang="en-US" sz="1200" dirty="0"/>
+          </a:p>
+        </p:txBody>
+      </p:sp>
+      <p:sp>
+        <p:nvSpPr>
+          <p:cNvPr id="14" name="case-v-0-2"/>
+          <p:cNvSpPr txBox="1"/>
+          <p:nvPr/>
+        </p:nvSpPr>
+        <p:spPr>
+          <a:xfrm>
+            <a:off x="2560320" y="3511296"/>
+            <a:ext cx="1600200" cy="475488"/>
+          </a:xfrm>
+          <a:prstGeom prst="rect">
+            <a:avLst/>
+          </a:prstGeom>
+          <a:noFill/>
+          <a:ln/>
+        </p:spPr>
+        <p:txBody>
+          <a:bodyPr wrap="square" lIns="0" tIns="0" rIns="0" bIns="0" rtlCol="0" anchor="ctr"/>
+          <a:lstStyle/>
+          <a:p>
+            <a:pPr algn="r" indent="0" marL="0">
+              <a:buNone/>
+            </a:pPr>
+            <a:r>
+              <a:rPr lang="en-US" sz="1200" b="1" dirty="0">
+                <a:solidFill>
+                  <a:schemeClr val="accent1"/>
+                </a:solidFill>
+              </a:rPr>
+              <a:t>별도 특약으로 추가</a:t>
+            </a:r>
+            <a:endParaRPr lang="en-US" sz="1200" dirty="0"/>
+          </a:p>
+        </p:txBody>
+      </p:sp>
+      <p:sp>
+        <p:nvSpPr>
+          <p:cNvPr id="15" name="case-card-1"/>
+          <p:cNvSpPr/>
+          <p:nvPr/>
+        </p:nvSpPr>
+        <p:spPr>
+          <a:xfrm>
+            <a:off x="4663440" y="1097280"/>
+            <a:ext cx="3931920" cy="3154680"/>
+          </a:xfrm>
+          <a:prstGeom prst="roundRect">
+            <a:avLst>
+              <a:gd name="adj" fmla="val 5797"/>
+            </a:avLst>
+          </a:prstGeom>
+          <a:solidFill>
+            <a:schemeClr val="bg2"/>
+          </a:solidFill>
+          <a:ln/>
+        </p:spPr>
+      </p:sp>
+      <p:sp>
+        <p:nvSpPr>
+          <p:cNvPr id="16" name="case-h-1"/>
+          <p:cNvSpPr txBox="1"/>
+          <p:nvPr/>
+        </p:nvSpPr>
+        <p:spPr>
+          <a:xfrm>
+            <a:off x="4937760" y="1280160"/>
+            <a:ext cx="3383280" cy="292608"/>
+          </a:xfrm>
+          <a:prstGeom prst="rect">
+            <a:avLst/>
+          </a:prstGeom>
+          <a:noFill/>
+          <a:ln/>
+        </p:spPr>
+        <p:txBody>
+          <a:bodyPr wrap="square" lIns="0" tIns="0" rIns="0" bIns="0" rtlCol="0" anchor="ctr"/>
+          <a:lstStyle/>
+          <a:p>
+            <a:pPr indent="0" marL="0">
+              <a:buNone/>
+            </a:pPr>
+            <a:r>
+              <a:rPr lang="en-US" sz="1300" b="1" dirty="0">
+                <a:solidFill>
+                  <a:schemeClr val="tx2"/>
+                </a:solidFill>
+              </a:rPr>
+              <a:t>백내장 다초점 · 양쪽 눈(다른 날)</a:t>
+            </a:r>
+            <a:endParaRPr lang="en-US" sz="1300" dirty="0"/>
+          </a:p>
+        </p:txBody>
+      </p:sp>
+      <p:sp>
+        <p:nvSpPr>
+          <p:cNvPr id="17" name="case-cost-1"/>
+          <p:cNvSpPr txBox="1"/>
+          <p:nvPr/>
+        </p:nvSpPr>
+        <p:spPr>
+          <a:xfrm>
+            <a:off x="4937760" y="1600200"/>
+            <a:ext cx="3383280" cy="548640"/>
+          </a:xfrm>
+          <a:prstGeom prst="rect">
+            <a:avLst/>
+          </a:prstGeom>
+          <a:noFill/>
+          <a:ln/>
+        </p:spPr>
+        <p:txBody>
+          <a:bodyPr wrap="square" lIns="0" tIns="0" rIns="0" bIns="0" rtlCol="0" anchor="ctr"/>
+          <a:lstStyle/>
+          <a:p>
+            <a:pPr indent="0" marL="0">
+              <a:buNone/>
+            </a:pPr>
+            <a:r>
+              <a:rPr lang="en-US" sz="3000" b="1" dirty="0">
+                <a:solidFill>
+                  <a:schemeClr val="tx1"/>
+                </a:solidFill>
+              </a:rPr>
+              <a:t>360만원</a:t>
+            </a:r>
+            <a:endParaRPr lang="en-US" sz="3000" dirty="0"/>
+          </a:p>
+        </p:txBody>
+      </p:sp>
+      <p:sp>
+        <p:nvSpPr>
+          <p:cNvPr id="18" name="case-row-1-0"/>
+          <p:cNvSpPr/>
+          <p:nvPr/>
+        </p:nvSpPr>
+        <p:spPr>
+          <a:xfrm>
+            <a:off x="4846320" y="2377440"/>
+            <a:ext cx="3566160" cy="475488"/>
+          </a:xfrm>
+          <a:prstGeom prst="roundRect">
+            <a:avLst>
+              <a:gd name="adj" fmla="val 23077"/>
+            </a:avLst>
+          </a:prstGeom>
+          <a:solidFill>
+            <a:schemeClr val="bg1"/>
+          </a:solidFill>
+          <a:ln/>
+        </p:spPr>
+      </p:sp>
+      <p:sp>
+        <p:nvSpPr>
+          <p:cNvPr id="19" name="case-k-1-0"/>
+          <p:cNvSpPr txBox="1"/>
+          <p:nvPr/>
+        </p:nvSpPr>
+        <p:spPr>
+          <a:xfrm>
+            <a:off x="5029200" y="2377440"/>
+            <a:ext cx="1737360" cy="475488"/>
+          </a:xfrm>
+          <a:prstGeom prst="rect">
+            <a:avLst/>
+          </a:prstGeom>
+          <a:noFill/>
+          <a:ln/>
+        </p:spPr>
+        <p:txBody>
+          <a:bodyPr wrap="square" lIns="0" tIns="0" rIns="0" bIns="0" rtlCol="0" anchor="ctr"/>
+          <a:lstStyle/>
+          <a:p>
+            <a:pPr indent="0" marL="0">
+              <a:buNone/>
+            </a:pPr>
+            <a:r>
+              <a:rPr lang="en-US" sz="1200" dirty="0">
+                <a:solidFill>
+                  <a:schemeClr val="tx2"/>
+                </a:solidFill>
+              </a:rPr>
+              <a:t>5세대 실손 본인부담</a:t>
+            </a:r>
+            <a:endParaRPr lang="en-US" sz="1200" dirty="0"/>
+          </a:p>
+        </p:txBody>
+      </p:sp>
+      <p:sp>
+        <p:nvSpPr>
+          <p:cNvPr id="20" name="case-v-1-0"/>
+          <p:cNvSpPr txBox="1"/>
+          <p:nvPr/>
+        </p:nvSpPr>
+        <p:spPr>
+          <a:xfrm>
+            <a:off x="6675120" y="2377440"/>
+            <a:ext cx="1600200" cy="475488"/>
+          </a:xfrm>
+          <a:prstGeom prst="rect">
+            <a:avLst/>
+          </a:prstGeom>
+          <a:noFill/>
+          <a:ln/>
+        </p:spPr>
+        <p:txBody>
+          <a:bodyPr wrap="square" lIns="0" tIns="0" rIns="0" bIns="0" rtlCol="0" anchor="ctr"/>
+          <a:lstStyle/>
+          <a:p>
+            <a:pPr algn="r" indent="0" marL="0">
+              <a:buNone/>
+            </a:pPr>
+            <a:r>
+              <a:rPr lang="en-US" sz="1200" b="1" dirty="0">
+                <a:solidFill>
+                  <a:schemeClr val="accent5"/>
+                </a:solidFill>
+              </a:rPr>
+              <a:t>180만원</a:t>
+            </a:r>
+            <a:endParaRPr lang="en-US" sz="1200" dirty="0"/>
+          </a:p>
+        </p:txBody>
+      </p:sp>
+      <p:sp>
+        <p:nvSpPr>
+          <p:cNvPr id="21" name="case-row-1-1"/>
+          <p:cNvSpPr/>
+          <p:nvPr/>
+        </p:nvSpPr>
+        <p:spPr>
+          <a:xfrm>
+            <a:off x="4846320" y="2944368"/>
+            <a:ext cx="3566160" cy="475488"/>
+          </a:xfrm>
+          <a:prstGeom prst="roundRect">
+            <a:avLst>
+              <a:gd name="adj" fmla="val 23077"/>
+            </a:avLst>
+          </a:prstGeom>
+          <a:solidFill>
+            <a:schemeClr val="accent2"/>
+          </a:solidFill>
+          <a:ln/>
+        </p:spPr>
+      </p:sp>
+      <p:sp>
+        <p:nvSpPr>
+          <p:cNvPr id="22" name="case-k-1-1"/>
+          <p:cNvSpPr txBox="1"/>
+          <p:nvPr/>
+        </p:nvSpPr>
+        <p:spPr>
+          <a:xfrm>
+            <a:off x="5029200" y="2944368"/>
+            <a:ext cx="1737360" cy="475488"/>
+          </a:xfrm>
+          <a:prstGeom prst="rect">
+            <a:avLst/>
+          </a:prstGeom>
+          <a:noFill/>
+          <a:ln/>
+        </p:spPr>
+        <p:txBody>
+          <a:bodyPr wrap="square" lIns="0" tIns="0" rIns="0" bIns="0" rtlCol="0" anchor="ctr"/>
+          <a:lstStyle/>
+          <a:p>
+            <a:pPr indent="0" marL="0">
+              <a:buNone/>
+            </a:pPr>
+            <a:r>
+              <a:rPr lang="en-US" sz="1200" dirty="0">
+                <a:solidFill>
+                  <a:schemeClr val="tx2"/>
+                </a:solidFill>
+              </a:rPr>
+              <a:t>1-5종 수술비</a:t>
+            </a:r>
+            <a:endParaRPr lang="en-US" sz="1200" dirty="0"/>
+          </a:p>
+        </p:txBody>
+      </p:sp>
+      <p:sp>
+        <p:nvSpPr>
+          <p:cNvPr id="23" name="case-v-1-1"/>
+          <p:cNvSpPr txBox="1"/>
+          <p:nvPr/>
+        </p:nvSpPr>
+        <p:spPr>
+          <a:xfrm>
+            <a:off x="6675120" y="2944368"/>
+            <a:ext cx="1600200" cy="475488"/>
+          </a:xfrm>
+          <a:prstGeom prst="rect">
+            <a:avLst/>
+          </a:prstGeom>
+          <a:noFill/>
+          <a:ln/>
+        </p:spPr>
+        <p:txBody>
+          <a:bodyPr wrap="square" lIns="0" tIns="0" rIns="0" bIns="0" rtlCol="0" anchor="ctr"/>
+          <a:lstStyle/>
+          <a:p>
+            <a:pPr algn="r" indent="0" marL="0">
+              <a:buNone/>
+            </a:pPr>
+            <a:r>
+              <a:rPr lang="en-US" sz="1200" b="1" dirty="0">
+                <a:solidFill>
+                  <a:schemeClr val="accent1"/>
+                </a:solidFill>
+              </a:rPr>
+              <a:t>1종 × 2회</a:t>
+            </a:r>
+            <a:endParaRPr lang="en-US" sz="1200" dirty="0"/>
+          </a:p>
+        </p:txBody>
+      </p:sp>
+      <p:sp>
+        <p:nvSpPr>
+          <p:cNvPr id="24" name="case-row-1-2"/>
+          <p:cNvSpPr/>
+          <p:nvPr/>
+        </p:nvSpPr>
+        <p:spPr>
+          <a:xfrm>
+            <a:off x="4846320" y="3511296"/>
+            <a:ext cx="3566160" cy="475488"/>
+          </a:xfrm>
+          <a:prstGeom prst="roundRect">
+            <a:avLst>
+              <a:gd name="adj" fmla="val 23077"/>
+            </a:avLst>
+          </a:prstGeom>
+          <a:solidFill>
+            <a:schemeClr val="accent2"/>
+          </a:solidFill>
+          <a:ln/>
+        </p:spPr>
+      </p:sp>
+      <p:sp>
+        <p:nvSpPr>
+          <p:cNvPr id="25" name="case-k-1-2"/>
+          <p:cNvSpPr txBox="1"/>
+          <p:nvPr/>
+        </p:nvSpPr>
+        <p:spPr>
+          <a:xfrm>
+            <a:off x="5029200" y="3511296"/>
+            <a:ext cx="1737360" cy="475488"/>
+          </a:xfrm>
+          <a:prstGeom prst="rect">
+            <a:avLst/>
+          </a:prstGeom>
+          <a:noFill/>
+          <a:ln/>
+        </p:spPr>
+        <p:txBody>
+          <a:bodyPr wrap="square" lIns="0" tIns="0" rIns="0" bIns="0" rtlCol="0" anchor="ctr"/>
+          <a:lstStyle/>
+          <a:p>
+            <a:pPr indent="0" marL="0">
+              <a:buNone/>
+            </a:pPr>
+            <a:r>
+              <a:rPr lang="en-US" sz="1200" dirty="0">
+                <a:solidFill>
+                  <a:schemeClr val="tx2"/>
+                </a:solidFill>
+              </a:rPr>
+              <a:t>131대 [백내장]</a:t>
+            </a:r>
+            <a:endParaRPr lang="en-US" sz="1200" dirty="0"/>
+          </a:p>
+        </p:txBody>
+      </p:sp>
+      <p:sp>
+        <p:nvSpPr>
+          <p:cNvPr id="26" name="case-v-1-2"/>
+          <p:cNvSpPr txBox="1"/>
+          <p:nvPr/>
+        </p:nvSpPr>
+        <p:spPr>
+          <a:xfrm>
+            <a:off x="6675120" y="3511296"/>
+            <a:ext cx="1600200" cy="475488"/>
+          </a:xfrm>
+          <a:prstGeom prst="rect">
+            <a:avLst/>
+          </a:prstGeom>
+          <a:noFill/>
+          <a:ln/>
+        </p:spPr>
+        <p:txBody>
+          <a:bodyPr wrap="square" lIns="0" tIns="0" rIns="0" bIns="0" rtlCol="0" anchor="ctr"/>
+          <a:lstStyle/>
+          <a:p>
+            <a:pPr algn="r" indent="0" marL="0">
+              <a:buNone/>
+            </a:pPr>
+            <a:r>
+              <a:rPr lang="en-US" sz="1200" b="1" dirty="0">
+                <a:solidFill>
+                  <a:schemeClr val="accent1"/>
+                </a:solidFill>
+              </a:rPr>
+              <a:t>가입금액 × 2회</a:t>
+            </a:r>
+            <a:endParaRPr lang="en-US" sz="1200" dirty="0"/>
+          </a:p>
+        </p:txBody>
+      </p:sp>
+      <p:sp>
+        <p:nvSpPr>
+          <p:cNvPr id="27" name="source"/>
+          <p:cNvSpPr txBox="1"/>
+          <p:nvPr/>
+        </p:nvSpPr>
+        <p:spPr>
+          <a:xfrm>
+            <a:off x="548640" y="4443984"/>
+            <a:ext cx="8046720" cy="274320"/>
+          </a:xfrm>
+          <a:prstGeom prst="rect">
+            <a:avLst/>
+          </a:prstGeom>
+          <a:noFill/>
+          <a:ln/>
+        </p:spPr>
+        <p:txBody>
+          <a:bodyPr wrap="square" lIns="0" tIns="0" rIns="0" bIns="0" rtlCol="0" anchor="ctr"/>
+          <a:lstStyle/>
+          <a:p>
+            <a:pPr indent="0" marL="0">
+              <a:buNone/>
+            </a:pPr>
+            <a:r>
+              <a:rPr lang="en-US" sz="900" dirty="0">
+                <a:solidFill>
+                  <a:schemeClr val="accent3"/>
+                </a:solidFill>
+              </a:rPr>
+              <a:t>가정값: 단순 계산(중증 30%·비중증 50%). 로봇 암수술 종은 방식에 따라 다름 · 다빈치 암수술비 최초 1회 · 같은 날 양쪽이면 131대 1회</a:t>
+            </a:r>
+            <a:endParaRPr lang="en-US" sz="900" dirty="0"/>
+          </a:p>
+        </p:txBody>
+      </p:sp>
+      <p:sp>
+        <p:nvSpPr>
+          <p:cNvPr id="25" name="Slide Number Placeholder 0"/>
+          <p:cNvSpPr>
+            <a:spLocks noGrp="1"/>
+          </p:cNvSpPr>
+          <p:nvPr>
+            <p:ph type="sldNum" sz="quarter" idx="4294967295"/>
+          </p:nvPr>
+        </p:nvSpPr>
+        <p:spPr>
+          <a:xfrm>
+            <a:off x="8229600" y="4773168"/>
+            <a:ext cx="365760" cy="228600"/>
+          </a:xfrm>
+          <a:prstGeom prst="rect">
+            <a:avLst/>
+          </a:prstGeom>
+          <a:extLst>
+            <a:ext uri="{C572A759-6A51-4108-AA02-DFA0A04FC94B}">
+              <ma14:wrappingTextBoxFlag xmlns:ma14="http://schemas.microsoft.com/office/mac/drawingml/2011/main" val="0"/>
+            </a:ext>
+          </a:extLst>
+        </p:spPr>
+        <p:txBody>
+          <a:bodyPr/>
+          <a:lstStyle>
+            <a:lvl1pPr>
+              <a:defRPr sz="900">
+                <a:solidFill>
+                  <a:schemeClr val="accent3"/>
+                </a:solidFill>
+              </a:defRPr>
+            </a:lvl1pPr>
+          </a:lstStyle>
+          <a:p>
+            <a:pPr algn="r"/>
+            <a:fld id="{F7021451-1387-4CA6-816F-3879F97B5CBC}" type="slidenum">
+              <a:rPr b="0" lang="en-US"/>
+              <a:t>18</a:t>
+            </a:fld>
+            <a:endParaRPr lang="en-US"/>
+          </a:p>
+        </p:txBody>
+      </p:sp>
+    </p:spTree>
+  </p:cSld>
+  <p:clrMapOvr>
+    <a:masterClrMapping/>
+  </p:clrMapOvr>
+</p:sld>
+</file>
+
+<file path=ppt/slides/slide19.xml><?xml version="1.0" encoding="utf-8"?>
+<p:sld xmlns:a="http://schemas.openxmlformats.org/drawingml/2006/main" xmlns:r="http://schemas.openxmlformats.org/officeDocument/2006/relationships" xmlns:p="http://schemas.openxmlformats.org/presentationml/2006/main">
+  <p:cSld name="Slide 19">
+    <p:spTree>
+      <p:nvGrpSpPr>
+        <p:cNvPr id="1" name=""/>
+        <p:cNvGrpSpPr/>
+        <p:nvPr/>
+      </p:nvGrpSpPr>
+      <p:grpSpPr>
+        <a:xfrm>
+          <a:off x="0" y="0"/>
+          <a:ext cx="0" cy="0"/>
+          <a:chOff x="0" y="0"/>
+          <a:chExt cx="0" cy="0"/>
+        </a:xfrm>
+      </p:grpSpPr>
+      <p:sp>
+        <p:nvSpPr>
+          <p:cNvPr id="2" name="Text 1"/>
+          <p:cNvSpPr/>
+          <p:nvPr>
+            <p:ph idx="101" type="title" hasCustomPrompt="1"/>
+          </p:nvPr>
+        </p:nvSpPr>
+        <p:spPr>
+          <a:xfrm>
+            <a:off x="548640" y="384048"/>
+            <a:ext cx="8046720" cy="548640"/>
+          </a:xfrm>
+          <a:prstGeom prst="rect">
+            <a:avLst/>
+          </a:prstGeom>
+          <a:noFill/>
+          <a:ln/>
+        </p:spPr>
+        <p:txBody>
+          <a:bodyPr wrap="square" lIns="0" tIns="0" rIns="0" bIns="0" rtlCol="0" anchor="ctr"/>
+          <a:lstStyle/>
+          <a:p>
+            <a:pPr algn="l" indent="0" marL="0">
+              <a:buNone/>
+            </a:pPr>
+            <a:r>
+              <a:rPr lang="en-US" sz="2600" b="1" dirty="0">
+                <a:solidFill>
+                  <a:schemeClr val="tx1"/>
+                </a:solidFill>
+              </a:rPr>
+              <a:t>자료 출처와 읽는 법</a:t>
+            </a:r>
+            <a:endParaRPr lang="en-US" sz="2600" dirty="0"/>
+          </a:p>
+        </p:txBody>
+      </p:sp>
+      <p:sp>
+        <p:nvSpPr>
+          <p:cNvPr id="3" name="sources"/>
+          <p:cNvSpPr txBox="1"/>
+          <p:nvPr/>
+        </p:nvSpPr>
+        <p:spPr>
+          <a:xfrm>
+            <a:off x="548640" y="1143000"/>
+            <a:ext cx="4937760" cy="3017520"/>
+          </a:xfrm>
+          <a:prstGeom prst="rect">
+            <a:avLst/>
+          </a:prstGeom>
+          <a:noFill/>
+          <a:ln/>
+        </p:spPr>
+        <p:txBody>
+          <a:bodyPr wrap="square" lIns="0" tIns="0" rIns="0" bIns="0" rtlCol="0" anchor="t"/>
+          <a:lstStyle/>
+          <a:p>
+            <a:pPr marL="342900" indent="-342900">
+              <a:spcAft>
+                <a:spcPts val="800"/>
+              </a:spcAft>
+              <a:buSzPct val="100000"/>
+              <a:buChar char="•"/>
+            </a:pPr>
+            <a:r>
+              <a:rPr lang="en-US" sz="1300" dirty="0">
+                <a:solidFill>
+                  <a:schemeClr val="tx1"/>
+                </a:solidFill>
+              </a:rPr>
+              <a:t>보건복지부·심평원 비급여 진료비용 공개 (2022·2025·2026 발표)</a:t>
+            </a:r>
+            <a:endParaRPr lang="en-US" sz="1300" dirty="0"/>
+          </a:p>
+          <a:p>
+            <a:pPr marL="342900" indent="-342900">
+              <a:spcAft>
+                <a:spcPts val="800"/>
+              </a:spcAft>
+              <a:buSzPct val="100000"/>
+              <a:buChar char="•"/>
+            </a:pPr>
+            <a:r>
+              <a:rPr lang="en-US" sz="1300" dirty="0">
+                <a:solidFill>
+                  <a:schemeClr val="tx1"/>
+                </a:solidFill>
+              </a:rPr>
+              <a:t>보건복지부·국민건강보험공단 비급여 보고제도 분석 (2025.9 진료분)</a:t>
+            </a:r>
+            <a:endParaRPr lang="en-US" sz="1300" dirty="0"/>
+          </a:p>
+          <a:p>
+            <a:pPr marL="342900" indent="-342900">
+              <a:spcAft>
+                <a:spcPts val="800"/>
+              </a:spcAft>
+              <a:buSzPct val="100000"/>
+              <a:buChar char="•"/>
+            </a:pPr>
+            <a:r>
+              <a:rPr lang="en-US" sz="1300" dirty="0">
+                <a:solidFill>
+                  <a:schemeClr val="tx1"/>
+                </a:solidFill>
+              </a:rPr>
+              <a:t>심평원 비급여 공개 보도: 로봇수술(2016), 하이푸(2021.9 반영)</a:t>
+            </a:r>
+            <a:endParaRPr lang="en-US" sz="1300" dirty="0"/>
+          </a:p>
+          <a:p>
+            <a:pPr marL="342900" indent="-342900">
+              <a:spcAft>
+                <a:spcPts val="800"/>
+              </a:spcAft>
+              <a:buSzPct val="100000"/>
+              <a:buChar char="•"/>
+            </a:pPr>
+            <a:r>
+              <a:rPr lang="en-US" sz="1300" dirty="0">
+                <a:solidFill>
+                  <a:schemeClr val="tx1"/>
+                </a:solidFill>
+              </a:rPr>
+              <a:t>언론: 데일리팜, 메디칼업저버, 아시아경제, 법률신문, 의학신문, 5세대 실손 출시 보도(2026.5)</a:t>
+            </a:r>
+            <a:endParaRPr lang="en-US" sz="1300" dirty="0"/>
+          </a:p>
+          <a:p>
+            <a:pPr marL="342900" indent="-342900">
+              <a:spcAft>
+                <a:spcPts val="800"/>
+              </a:spcAft>
+              <a:buSzPct val="100000"/>
+              <a:buChar char="•"/>
+            </a:pPr>
+            <a:r>
+              <a:rPr lang="en-US" sz="1300" dirty="0">
+                <a:solidFill>
+                  <a:schemeClr val="tx1"/>
+                </a:solidFill>
+              </a:rPr>
+              <a:t>당사 약관: 1-5종 수술분류표Ⅱ, 131대·130대 질병수술비 (특약검색기 tool.html)</a:t>
+            </a:r>
+            <a:endParaRPr lang="en-US" sz="1300" dirty="0"/>
+          </a:p>
+          <a:p>
+            <a:pPr marL="342900" indent="-342900">
+              <a:spcAft>
+                <a:spcPts val="800"/>
+              </a:spcAft>
+              <a:buSzPct val="100000"/>
+              <a:buChar char="•"/>
+            </a:pPr>
+            <a:r>
+              <a:rPr lang="en-US" sz="1300" dirty="0">
+                <a:solidFill>
+                  <a:schemeClr val="tx1"/>
+                </a:solidFill>
+              </a:rPr>
+              <a:t>병원 게시가·가격비교: 내손안의닥터, 모두닥, 병원 비급여 고지</a:t>
+            </a:r>
+            <a:endParaRPr lang="en-US" sz="1300" dirty="0"/>
+          </a:p>
+        </p:txBody>
+      </p:sp>
+      <p:sp>
+        <p:nvSpPr>
+          <p:cNvPr id="4" name="caution-card"/>
+          <p:cNvSpPr/>
+          <p:nvPr/>
+        </p:nvSpPr>
+        <p:spPr>
+          <a:xfrm>
+            <a:off x="5760720" y="1143000"/>
+            <a:ext cx="2834640" cy="1920240"/>
+          </a:xfrm>
+          <a:prstGeom prst="roundRect">
+            <a:avLst>
+              <a:gd name="adj" fmla="val 9524"/>
+            </a:avLst>
+          </a:prstGeom>
+          <a:solidFill>
+            <a:schemeClr val="accent2"/>
+          </a:solidFill>
+          <a:ln/>
+        </p:spPr>
+      </p:sp>
+      <p:sp>
+        <p:nvSpPr>
+          <p:cNvPr id="5" name="caution-text"/>
+          <p:cNvSpPr txBox="1"/>
+          <p:nvPr/>
+        </p:nvSpPr>
+        <p:spPr>
+          <a:xfrm>
+            <a:off x="5989320" y="1325880"/>
+            <a:ext cx="2377440" cy="1645920"/>
+          </a:xfrm>
+          <a:prstGeom prst="rect">
+            <a:avLst/>
+          </a:prstGeom>
+          <a:noFill/>
+          <a:ln/>
+        </p:spPr>
+        <p:txBody>
+          <a:bodyPr wrap="square" lIns="0" tIns="0" rIns="0" bIns="0" rtlCol="0" anchor="t"/>
+          <a:lstStyle/>
+          <a:p>
+            <a:pPr indent="0" marL="0">
+              <a:buNone/>
+            </a:pPr>
+            <a:r>
+              <a:rPr lang="en-US" sz="1400" b="1" dirty="0">
+                <a:solidFill>
+                  <a:schemeClr val="accent1"/>
+                </a:solidFill>
+              </a:rPr>
+              <a:t>꼭 알아 두세요</a:t>
+            </a:r>
+            <a:endParaRPr lang="en-US" sz="1400" dirty="0"/>
+          </a:p>
+          <a:p>
+            <a:pPr indent="0" marL="0">
+              <a:buNone/>
+            </a:pPr>
+            <a:r>
+              <a:rPr lang="en-US" sz="600" dirty="0">
+                <a:solidFill>
+                  <a:srgbClr val="000000"/>
+                </a:solidFill>
+              </a:rPr>
+              <a:t> </a:t>
+            </a:r>
+            <a:endParaRPr lang="en-US" sz="1400" dirty="0"/>
+          </a:p>
+          <a:p>
+            <a:pPr indent="0" marL="0">
+              <a:buNone/>
+            </a:pPr>
+            <a:r>
+              <a:rPr lang="en-US" sz="1200" dirty="0">
+                <a:solidFill>
+                  <a:schemeClr val="tx1"/>
+                </a:solidFill>
+              </a:rPr>
+              <a:t>공개 연도·집계 범위가 항목마다 달라요. 고객 안내 전 심평원 '비급여 진료비 정보'에서 최신 가격을 다시 확인하세요.</a:t>
+            </a:r>
+            <a:endParaRPr lang="en-US" sz="1400" dirty="0"/>
+          </a:p>
+        </p:txBody>
+      </p:sp>
+      <p:sp>
+        <p:nvSpPr>
+          <p:cNvPr id="25" name="Slide Number Placeholder 0"/>
+          <p:cNvSpPr>
+            <a:spLocks noGrp="1"/>
+          </p:cNvSpPr>
+          <p:nvPr>
+            <p:ph type="sldNum" sz="quarter" idx="4294967295"/>
+          </p:nvPr>
+        </p:nvSpPr>
+        <p:spPr>
+          <a:xfrm>
+            <a:off x="8229600" y="4773168"/>
+            <a:ext cx="365760" cy="228600"/>
+          </a:xfrm>
+          <a:prstGeom prst="rect">
+            <a:avLst/>
+          </a:prstGeom>
+          <a:extLst>
+            <a:ext uri="{C572A759-6A51-4108-AA02-DFA0A04FC94B}">
+              <ma14:wrappingTextBoxFlag xmlns:ma14="http://schemas.microsoft.com/office/mac/drawingml/2011/main" val="0"/>
+            </a:ext>
+          </a:extLst>
+        </p:spPr>
+        <p:txBody>
+          <a:bodyPr/>
+          <a:lstStyle>
+            <a:lvl1pPr>
+              <a:defRPr sz="900">
+                <a:solidFill>
+                  <a:schemeClr val="accent3"/>
+                </a:solidFill>
+              </a:defRPr>
+            </a:lvl1pPr>
+          </a:lstStyle>
+          <a:p>
+            <a:pPr algn="r"/>
+            <a:fld id="{F7021451-1387-4CA6-816F-3879F97B5CBC}" type="slidenum">
+              <a:rPr b="0" lang="en-US"/>
+              <a:t>19</a:t>
             </a:fld>
             <a:endParaRPr lang="en-US"/>
           </a:p>

--- a/dist/noncovered-surgery-guide.pptx
+++ b/dist/noncovered-surgery-guide.pptx
@@ -125,19 +125,19 @@
   <p:extLst>
     <p:ext uri="{521415D9-36F7-43E2-AB2F-B90AF26B5E84}">
       <p14:sectionLst xmlns:p14="http://schemas.microsoft.com/office/powerpoint/2010/main">
-        <p14:section name="표지" id="{abdfdee9-b8d6-d2eb-1bf0-3e8eaebb851e}">
+        <p14:section name="표지" id="{78b9a9aa-f556-b216-f6a5-0eb1053398e4}">
           <p14:sldIdLst>
             <p14:sldId id="256"/>
           </p14:sldIdLst>
         </p14:section>
-        <p14:section name="한눈에 보기" id="{1ef16ef6-2194-5916-1703-fe7cdf2bb38b}">
+        <p14:section name="한눈에 보기" id="{802d35c4-498f-8ce1-659b-2ee62dddbb53}">
           <p14:sldIdLst>
             <p14:sldId id="257"/>
             <p14:sldId id="258"/>
             <p14:sldId id="259"/>
           </p14:sldIdLst>
         </p14:section>
-        <p14:section name="수술별 상세" id="{638b512d-e291-1d7f-d8b9-a29ed1a6e4a9}">
+        <p14:section name="수술별 상세" id="{0fc05242-212a-11e2-741c-3fb70c96c598}">
           <p14:sldIdLst>
             <p14:sldId id="260"/>
             <p14:sldId id="261"/>
@@ -149,12 +149,12 @@
             <p14:sldId id="267"/>
           </p14:sldIdLst>
         </p14:section>
-        <p14:section name="질병으로 찾기" id="{fb6a8fef-9e08-ab47-be76-98eada5f5a50}">
+        <p14:section name="질병으로 찾기" id="{016b965f-fa03-4771-3a28-e5e4d63e199a}">
           <p14:sldIdLst>
             <p14:sldId id="268"/>
           </p14:sldIdLst>
         </p14:section>
-        <p14:section name="영업 포인트" id="{f7e65e90-af6e-e5c1-7b0d-e9c00563cb24}">
+        <p14:section name="영업 포인트" id="{1dd0abac-2a4e-2492-58e0-c353bd70a41e}">
           <p14:sldIdLst>
             <p14:sldId id="269"/>
             <p14:sldId id="270"/>
@@ -8676,7 +8676,7 @@
             </a:avLst>
           </a:prstGeom>
           <a:solidFill>
-            <a:srgbClr val="FFF3E0"/>
+            <a:schemeClr val="bg1"/>
           </a:solidFill>
           <a:ln/>
         </p:spPr>
@@ -8690,10 +8690,10 @@
             <a:r>
               <a:rPr lang="en-US" sz="1100" b="1" dirty="0">
                 <a:solidFill>
-                  <a:srgbClr val="D9480F"/>
-                </a:solidFill>
-              </a:rPr>
-              <a:t>확인 필요</a:t>
+                  <a:schemeClr val="accent1"/>
+                </a:solidFill>
+              </a:rPr>
+              <a:t>1종</a:t>
             </a:r>
             <a:endParaRPr lang="en-US" sz="1100" dirty="0"/>
           </a:p>
@@ -8729,7 +8729,7 @@
                   <a:schemeClr val="tx2"/>
                 </a:solidFill>
               </a:rPr>
-              <a:t>분류표에 이름 없음, 보상 확인</a:t>
+              <a:t>신의료기술 → 자궁 동일부위(53항)</a:t>
             </a:r>
             <a:endParaRPr lang="en-US" sz="900" dirty="0"/>
           </a:p>
@@ -8801,7 +8801,7 @@
                   <a:schemeClr val="tx2"/>
                 </a:solidFill>
               </a:rPr>
-              <a:t>수술 인정 시. 선근증은 [생식기질환]</a:t>
+              <a:t>자궁선근증은 [관절염,생식기질환]</a:t>
             </a:r>
             <a:endParaRPr lang="en-US" sz="900" dirty="0"/>
           </a:p>
@@ -9043,7 +9043,7 @@
                   <a:schemeClr val="accent3"/>
                 </a:solidFill>
               </a:rPr>
-              <a:t>근거: 당사 약관 1-5종 수술분류표Ⅱ·131대/130대 질병군. '확인 필요' = 분류표에 이름이 없어 보상 부서 확인 필요</a:t>
+              <a:t>근거: 당사 약관 1-5종 수술분류표Ⅱ 사용지침 5(신의료기술 = 동일부위 수술, 내시경·카테터 = 88항)·131대/130대 질병군</a:t>
             </a:r>
             <a:endParaRPr lang="en-US" sz="900" dirty="0"/>
           </a:p>
@@ -9546,7 +9546,7 @@
             </a:avLst>
           </a:prstGeom>
           <a:solidFill>
-            <a:srgbClr val="FFF3E0"/>
+            <a:schemeClr val="bg1"/>
           </a:solidFill>
           <a:ln/>
         </p:spPr>
@@ -9560,10 +9560,10 @@
             <a:r>
               <a:rPr lang="en-US" sz="1100" b="1" dirty="0">
                 <a:solidFill>
-                  <a:srgbClr val="D9480F"/>
-                </a:solidFill>
-              </a:rPr>
-              <a:t>확인 필요</a:t>
+                  <a:schemeClr val="accent1"/>
+                </a:solidFill>
+              </a:rPr>
+              <a:t>2종</a:t>
             </a:r>
             <a:endParaRPr lang="en-US" sz="1100" dirty="0"/>
           </a:p>
@@ -9599,7 +9599,7 @@
                   <a:schemeClr val="tx2"/>
                 </a:solidFill>
               </a:rPr>
-              <a:t>인정 시 88-2 척추 2종</a:t>
+              <a:t>카테터 경피적 수술 → 88-2 척추</a:t>
             </a:r>
             <a:endParaRPr lang="en-US" sz="900" dirty="0"/>
           </a:p>
@@ -9752,7 +9752,7 @@
             </a:avLst>
           </a:prstGeom>
           <a:solidFill>
-            <a:srgbClr val="FFF3E0"/>
+            <a:schemeClr val="bg1"/>
           </a:solidFill>
           <a:ln/>
         </p:spPr>
@@ -9766,10 +9766,10 @@
             <a:r>
               <a:rPr lang="en-US" sz="1100" b="1" dirty="0">
                 <a:solidFill>
-                  <a:srgbClr val="D9480F"/>
-                </a:solidFill>
-              </a:rPr>
-              <a:t>확인 필요</a:t>
+                  <a:schemeClr val="accent1"/>
+                </a:solidFill>
+              </a:rPr>
+              <a:t>1종</a:t>
             </a:r>
             <a:endParaRPr lang="en-US" sz="1100" dirty="0"/>
           </a:p>
@@ -9805,7 +9805,7 @@
                   <a:schemeClr val="tx2"/>
                 </a:solidFill>
               </a:rPr>
-              <a:t>인정 시 88-3 비뇨기 1종</a:t>
+              <a:t>내시경 수술 → 88-3 비뇨·생식기</a:t>
             </a:r>
             <a:endParaRPr lang="en-US" sz="900" dirty="0"/>
           </a:p>
@@ -9877,7 +9877,7 @@
                   <a:schemeClr val="tx2"/>
                 </a:solidFill>
               </a:rPr>
-              <a:t>신의료기술치료비 특약에 유로리프트 명시</a:t>
+              <a:t>신의료기술치료비 특약에도 명시</a:t>
             </a:r>
             <a:endParaRPr lang="en-US" sz="900" dirty="0"/>
           </a:p>
@@ -10119,7 +10119,7 @@
                   <a:schemeClr val="accent3"/>
                 </a:solidFill>
               </a:rPr>
-              <a:t>근거: 당사 약관 1-5종 수술분류표Ⅱ·131대/130대 질병군. '확인 필요' = 분류표에 이름이 없어 보상 부서 확인 필요</a:t>
+              <a:t>근거: 당사 약관 1-5종 수술분류표Ⅱ 사용지침 5(신의료기술 = 동일부위 수술, 내시경·카테터 = 88항)·131대/130대 질병군</a:t>
             </a:r>
             <a:endParaRPr lang="en-US" sz="900" dirty="0"/>
           </a:p>
